--- a/en/slides/05-Computer_Architecture-Number_Representation_Integers-Code.pptx
+++ b/en/slides/05-Computer_Architecture-Number_Representation_Integers-Code.pptx
@@ -126,24 +126,36 @@
   <p:extLst>
     <p:ext uri="{521415D9-36F7-43E2-AB2F-B90AF26B5E84}">
       <p14:sectionLst xmlns:p14="http://schemas.microsoft.com/office/powerpoint/2010/main">
-        <p14:section name="Opening" id="{5271b01c-d769-b584-7752-c1fb17852ca0}">
+        <p14:section name="Opening" id="{b66b80ed-e016-ff2b-7541-35a4a867aa39}">
           <p14:sldIdLst>
             <p14:sldId id="256"/>
             <p14:sldId id="257"/>
           </p14:sldIdLst>
         </p14:section>
-        <p14:section name="The listings" id="{62c76076-b4be-d7a1-a9f0-337379188d68}">
+        <p14:section name="Warm-up on the machine" id="{28fc5824-e7c8-dfce-a5af-27b0fef716e2}">
           <p14:sldIdLst>
             <p14:sldId id="258"/>
+          </p14:sldIdLst>
+        </p14:section>
+        <p14:section name="Natural numbers and overflow" id="{546b93f9-d598-5d3c-1f34-5e49e00c8b45}">
+          <p14:sldIdLst>
             <p14:sldId id="259"/>
+          </p14:sldIdLst>
+        </p14:section>
+        <p14:section name="Signed integers" id="{3d695fce-6e40-da2c-8284-757cdbd8002a}">
+          <p14:sldIdLst>
             <p14:sldId id="260"/>
+          </p14:sldIdLst>
+        </p14:section>
+        <p14:section name="Back to the machine" id="{292b0832-8f8a-a99e-8eab-b3819468d4ed}">
+          <p14:sldIdLst>
             <p14:sldId id="261"/>
             <p14:sldId id="262"/>
             <p14:sldId id="263"/>
             <p14:sldId id="264"/>
           </p14:sldIdLst>
         </p14:section>
-        <p14:section name="The complete program" id="{eb04087e-1fa1-cae0-7483-19162d379520}">
+        <p14:section name="The complete program" id="{e75156f2-bd60-d701-3355-639a9941bbc4}">
           <p14:sldIdLst>
             <p14:sldId id="265"/>
             <p14:sldId id="266"/>
@@ -152,7 +164,7 @@
             <p14:sldId id="269"/>
           </p14:sldIdLst>
         </p14:section>
-        <p14:section name="Run it and test it" id="{b6c38de8-33bb-c1a5-d3a8-1e36fb0a2c35}">
+        <p14:section name="Run it and test it" id="{6d4afc29-fb56-701d-0330-e29a204936c7}">
           <p14:sldIdLst>
             <p14:sldId id="270"/>
             <p14:sldId id="271"/>
@@ -161,7 +173,7 @@
             <p14:sldId id="274"/>
           </p14:sldIdLst>
         </p14:section>
-        <p14:section name="Exercises" id="{023abdca-dfb4-2434-684f-7865e1c49b07}">
+        <p14:section name="Exercises" id="{bf43968c-9232-49ce-f1de-5f2d1daf022b}">
           <p14:sldIdLst>
             <p14:sldId id="275"/>
           </p14:sldIdLst>
@@ -3235,7 +3247,63 @@
       </p:sp>
       <p:sp>
         <p:nvSpPr>
-          <p:cNvPr id="11" name="Shape 9"/>
+          <p:cNvPr id="11" name="Text 9"/>
+          <p:cNvSpPr txBox="1"/>
+          <p:nvPr/>
+        </p:nvSpPr>
+        <p:spPr>
+          <a:xfrm>
+            <a:off x="4693615" y="566928"/>
+            <a:ext cx="6949440" cy="640080"/>
+          </a:xfrm>
+          <a:prstGeom prst="rect">
+            <a:avLst/>
+          </a:prstGeom>
+          <a:noFill/>
+          <a:ln/>
+        </p:spPr>
+        <p:txBody>
+          <a:bodyPr wrap="square" lIns="0" tIns="0" rIns="0" bIns="0" rtlCol="0" anchor="t"/>
+          <a:lstStyle/>
+          <a:p>
+            <a:pPr algn="r" indent="0" marL="0">
+              <a:buNone/>
+            </a:pPr>
+            <a:r>
+              <a:rPr lang="en-US" sz="1300" dirty="0">
+                <a:solidFill>
+                  <a:srgbClr val="CFE3EA"/>
+                </a:solidFill>
+                <a:latin typeface="Calibri" pitchFamily="34" charset="0"/>
+                <a:ea typeface="Calibri" pitchFamily="34" charset="-122"/>
+                <a:cs typeface="Calibri" pitchFamily="34" charset="-120"/>
+              </a:rPr>
+              <a:t>Code deck. The concepts, the figures and the questions are in the lecture deck:</a:t>
+            </a:r>
+            <a:endParaRPr lang="en-US" sz="1300" dirty="0"/>
+          </a:p>
+          <a:p>
+            <a:pPr algn="r" indent="0" marL="0">
+              <a:buNone/>
+            </a:pPr>
+            <a:r>
+              <a:rPr lang="en-US" sz="1300" dirty="0">
+                <a:solidFill>
+                  <a:srgbClr val="CFE3EA"/>
+                </a:solidFill>
+                <a:latin typeface="Calibri" pitchFamily="34" charset="0"/>
+                <a:ea typeface="Calibri" pitchFamily="34" charset="-122"/>
+                <a:cs typeface="Calibri" pitchFamily="34" charset="-120"/>
+              </a:rPr>
+              <a:t>05-Computer_Architecture-Number_Representation_Integers.pptx</a:t>
+            </a:r>
+            <a:endParaRPr lang="en-US" sz="1300" dirty="0"/>
+          </a:p>
+        </p:txBody>
+      </p:sp>
+      <p:sp>
+        <p:nvSpPr>
+          <p:cNvPr id="12" name="Shape 10"/>
           <p:cNvSpPr/>
           <p:nvPr/>
         </p:nvSpPr>
@@ -3262,7 +3330,7 @@
       </p:sp>
       <p:pic>
         <p:nvPicPr>
-          <p:cNvPr id="12" name="Image 0" descr="/Users/raffaelemontella/devel/riscv-prg32/computer-architecture-with-prg32/tools/assets/lab2_step2_move.png">    </p:cNvPr>
+          <p:cNvPr id="13" name="Image 0" descr="/Users/raffaelemontella/devel/riscv-prg32/computer-architecture-with-prg32/tools/assets/lab2_step2_move.png">    </p:cNvPr>
           <p:cNvPicPr>
             <a:picLocks noChangeAspect="1"/>
           </p:cNvPicPr>

--- a/en/slides/05-Computer_Architecture-Number_Representation_Integers-Code.pptx
+++ b/en/slides/05-Computer_Architecture-Number_Representation_Integers-Code.pptx
@@ -126,28 +126,28 @@
   <p:extLst>
     <p:ext uri="{521415D9-36F7-43E2-AB2F-B90AF26B5E84}">
       <p14:sectionLst xmlns:p14="http://schemas.microsoft.com/office/powerpoint/2010/main">
-        <p14:section name="Opening" id="{b66b80ed-e016-ff2b-7541-35a4a867aa39}">
+        <p14:section name="Opening" id="{da70a767-e1b9-8e63-678b-5e791fce2f65}">
           <p14:sldIdLst>
             <p14:sldId id="256"/>
             <p14:sldId id="257"/>
           </p14:sldIdLst>
         </p14:section>
-        <p14:section name="Warm-up on the machine" id="{28fc5824-e7c8-dfce-a5af-27b0fef716e2}">
+        <p14:section name="Warm-up on the machine" id="{778d1fe2-22ef-97a1-7dcc-1985b720f5fe}">
           <p14:sldIdLst>
             <p14:sldId id="258"/>
           </p14:sldIdLst>
         </p14:section>
-        <p14:section name="Natural numbers and overflow" id="{546b93f9-d598-5d3c-1f34-5e49e00c8b45}">
+        <p14:section name="Natural numbers and overflow" id="{0d0b85bb-f2df-3ea5-3dd8-0d8a16d8eea6}">
           <p14:sldIdLst>
             <p14:sldId id="259"/>
           </p14:sldIdLst>
         </p14:section>
-        <p14:section name="Signed integers" id="{3d695fce-6e40-da2c-8284-757cdbd8002a}">
+        <p14:section name="Signed integers" id="{cc4b13d5-788a-2aa0-eba9-4b9b013e6cfb}">
           <p14:sldIdLst>
             <p14:sldId id="260"/>
           </p14:sldIdLst>
         </p14:section>
-        <p14:section name="Back to the machine" id="{292b0832-8f8a-a99e-8eab-b3819468d4ed}">
+        <p14:section name="Back to the machine" id="{30160bf0-0afb-f9b7-941f-52e4eed6dc89}">
           <p14:sldIdLst>
             <p14:sldId id="261"/>
             <p14:sldId id="262"/>
@@ -155,7 +155,7 @@
             <p14:sldId id="264"/>
           </p14:sldIdLst>
         </p14:section>
-        <p14:section name="The complete program" id="{e75156f2-bd60-d701-3355-639a9941bbc4}">
+        <p14:section name="The complete program" id="{5b9f1cac-27cb-8f49-65d7-f8c9e245c2bd}">
           <p14:sldIdLst>
             <p14:sldId id="265"/>
             <p14:sldId id="266"/>
@@ -164,7 +164,7 @@
             <p14:sldId id="269"/>
           </p14:sldIdLst>
         </p14:section>
-        <p14:section name="Run it and test it" id="{6d4afc29-fb56-701d-0330-e29a204936c7}">
+        <p14:section name="Run it and test it" id="{0831800d-6ada-8aac-e908-9a8785deec1f}">
           <p14:sldIdLst>
             <p14:sldId id="270"/>
             <p14:sldId id="271"/>
@@ -173,7 +173,7 @@
             <p14:sldId id="274"/>
           </p14:sldIdLst>
         </p14:section>
-        <p14:section name="Exercises" id="{bf43968c-9232-49ce-f1de-5f2d1daf022b}">
+        <p14:section name="Exercises" id="{504a5dbe-6cfe-77a9-1df0-0986bb86a166}">
           <p14:sldIdLst>
             <p14:sldId id="275"/>
           </p14:sldIdLst>
@@ -582,7 +582,9 @@
           <a:p>
             <a:r>
               <a:rPr lang="en-US" dirty="0"/>
-              <a:t>This is the code deck of Lecture 05. The lecture deck holds the concepts; this one holds everything you type and run: the listings with their explanation, the complete program, what it shows, and the way to test it on each of the three hosts.</a:t>
+              <a:t>This is the code deck of Lecture 05. The lecture deck holds the concepts; this one holds everything you type and run: the listings with their explanation, the complete program, what it shows, and the way to test it on each of the three hosts.
+Learning status: UNDERSTAND NOW, by the end of this lecture you explain it, trace it and apply it on your own; USE NOW, you follow and use the recipe today; how it works inside is explained later, or is not part of the course; UNDERSTAND LATER, recognise the name and what it is for; a later lecture explains it. A slide without a badge is context: a story, an example, a question, an exercise.
+Learning status of this lecture. UNDERSTAND NOW: two's complement; base conversions; naturals and overflow; shifts as multiplications; sign and magnitude; signed or unsigned instructions; sign extension. USE NOW: the PRG32 runtime calls, the complete program, the PRG32 tools (used, not studied, in this course). UNDERSTAND LATER: nothing. A slide without a badge is context: a story, an example, a question, an exercise.</a:t>
             </a:r>
             <a:endParaRPr lang="en-US" dirty="0"/>
           </a:p>
@@ -671,6 +673,7 @@
             <a:r>
               <a:rPr lang="en-US" dirty="0"/>
               <a:t>One page of the complete program, exactly as it is in the repository. Read it from the top: the header says what the program shows and how to build it; the three functions init, update and draw follow, then the data. Lines that you met in the listings of the lecture have the same comments here.
+USE NOW: the complete program (used, not studied, in this course).
 For the lecturer: code/l05.S, as built and run by the tests. The comments are part of the program: read them with the code.</a:t>
             </a:r>
             <a:endParaRPr lang="en-US" dirty="0"/>
@@ -760,6 +763,7 @@
             <a:r>
               <a:rPr lang="en-US" dirty="0"/>
               <a:t>One page of the complete program, exactly as it is in the repository. Read it from the top: the header says what the program shows and how to build it; the three functions init, update and draw follow, then the data. Lines that you met in the listings of the lecture have the same comments here.
+USE NOW: the complete program (used, not studied, in this course).
 For the lecturer: code/l05.S, as built and run by the tests. The comments are part of the program: read them with the code.</a:t>
             </a:r>
             <a:endParaRPr lang="en-US" dirty="0"/>
@@ -849,6 +853,7 @@
             <a:r>
               <a:rPr lang="en-US" dirty="0"/>
               <a:t>One page of the complete program, exactly as it is in the repository. Read it from the top: the header says what the program shows and how to build it; the three functions init, update and draw follow, then the data. Lines that you met in the listings of the lecture have the same comments here.
+USE NOW: the complete program (used, not studied, in this course).
 For the lecturer: code/l05.S, as built and run by the tests. The comments are part of the program: read them with the code.</a:t>
             </a:r>
             <a:endParaRPr lang="en-US" dirty="0"/>
@@ -938,6 +943,7 @@
             <a:r>
               <a:rPr lang="en-US" dirty="0"/>
               <a:t>One page of the complete program, exactly as it is in the repository. Read it from the top: the header says what the program shows and how to build it; the three functions init, update and draw follow, then the data. Lines that you met in the listings of the lecture have the same comments here.
+USE NOW: the complete program (used, not studied, in this course).
 For the lecturer: code/l05.S, as built and run by the tests. The comments are part of the program: read them with the code.</a:t>
             </a:r>
             <a:endParaRPr lang="en-US" dirty="0"/>
@@ -1027,6 +1033,7 @@
             <a:r>
               <a:rPr lang="en-US" dirty="0"/>
               <a:t>One page of the complete program, exactly as it is in the repository. Read it from the top: the header says what the program shows and how to build it; the three functions init, update and draw follow, then the data. Lines that you met in the listings of the lecture have the same comments here.
+USE NOW: the complete program (used, not studied, in this course).
 For the lecturer: code/l05.S, as built and run by the tests. The comments are part of the program: read them with the code.</a:t>
             </a:r>
             <a:endParaRPr lang="en-US" dirty="0"/>
@@ -1205,6 +1212,7 @@
             <a:r>
               <a:rPr lang="en-US" dirty="0"/>
               <a:t>The quickest way: PRG32-QT on your own computer. Four steps, each with its command. PRG32-QT behaves like a board on port 8080, which is why the upload command says esp32c6. With debug mode enabled you can stop at any instruction and read registers and memory.
+USE NOW: the PRG32 tools (used, not studied, in this course).
 For the lecturer: Run by the tests: the cartridge of this slide is built with this command and executed on the headless runner of PRG32-QT. Without the toolchain: import the .prg32 file in PRG32-QT and choose Run Cartridge. Keys: arrows or WASD for the joystick, Z or J for A, X or K for B, Enter for Start, Escape to go back to Setup.</a:t>
             </a:r>
             <a:endParaRPr lang="en-US" dirty="0"/>
@@ -1294,6 +1302,7 @@
             <a:r>
               <a:rPr lang="en-US" dirty="0"/>
               <a:t>The same program on the emulator. QEMU runs the real firmware on an emulated chip, so the cartridge must be built for the architecture qemu. Stage the cartridge while QEMU is closed. The firmware opens on the Setup menu: choose Run Cartridge and the slot. Remember that the keyboard is read by the terminal, not by the window with the picture.
+USE NOW: the PRG32 tools (used, not studied, in this course).
 For the lecturer: Checked by the tests up to the staging: the cartridge is built for the architecture qemu and accepted into the flash image of the emulator. What the emulator then shows is not checked automatically: Espressif QEMU needs its window. Since October 2026 the firmware starts on Setup: choose Run Cartridge, then cart0.</a:t>
             </a:r>
             <a:endParaRPr lang="en-US" dirty="0"/>
@@ -1383,6 +1392,7 @@
             <a:r>
               <a:rPr lang="en-US" dirty="0"/>
               <a:t>The same program on the kit. The firmware is written once, through USB; after that cartridges travel over Wi-Fi. The upload command is the one used for PRG32-QT with the address of the board. This is the only host that the automatic tests do not run: try it, and report what you see.
+USE NOW: the PRG32 tools (used, not studied, in this course).
 For the lecturer: Not run by the tests: there is no board on the test machine. The cartridge for the architecture esp32c6 is built by the tests; the steps are those of the PRG32 documentation. If the serial port is not found pass it explicitly. To use the Wi-Fi of the classroom: python3 -m prg32 wifi set --ssid NAME --password PASSWORD --mode sta.</a:t>
             </a:r>
             <a:endParaRPr lang="en-US" dirty="0"/>
@@ -1472,6 +1482,7 @@
             <a:r>
               <a:rPr lang="en-US" dirty="0"/>
               <a:t>The five most common symptoms, what each means, and what to do. Read the message before changing anything: it nearly always names the cause.
+USE NOW: the PRG32 tools (used, not studied, in this course).
 For the lecturer: The first three rows cover most cases. When asking for help, paste the command and the whole message as text. docs/usage/troubleshooting.md of the PRG32 repository has the complete list.</a:t>
             </a:r>
             <a:endParaRPr lang="en-US" dirty="0"/>
@@ -1739,6 +1750,7 @@
             <a:r>
               <a:rPr lang="en-US" dirty="0"/>
               <a:t>The code reads the buttons, loads marker_x from memory, subtracts 1 if LEFT is pressed and stores it back: the load, modify, store of Lecture 02. Hold LEFT and the printed value goes 00000002, 00000001, 00000000, and then FFFFFFFF. Is it a bug? Is FFFFFFFF the number 4,294,967,295, or is it minus one? The fourth callout gives the answer in advance: both, depending on how the bits are read. The rest of the lecture is the set of rules behind that sentence.
+UNDERSTAND NOW: two's complement. USE NOW: the PRG32 runtime calls (used, not studied, in this course).
 For the lecturer: Adapted from textbook lab 06-asm-state-and-input (step2_move.S) with SPEED 1 and a console print. Where to look: on the board and in QEMU the console is drawn on the screen, as 0x00000002 ... 0xffffffff; PRG32-QT does not draw the console, it collects it in its log, as 00000002 ... FFFFFFFF. Run it live before any theory, and write the students' guesses on the board.</a:t>
             </a:r>
             <a:endParaRPr lang="en-US" dirty="0"/>
@@ -1828,6 +1840,7 @@
             <a:r>
               <a:rPr lang="en-US" dirty="0"/>
               <a:t>Three properties of binary strings, each with a use. Adding zeros on the left does not change the value. Shifting left by k positions multiplies by 2 to the k: 00101, five, becomes 01010, ten. Shifting right by k divides by 2 to the k and discards the remainder. A shift is far cheaper for a circuit than a multiplication, and the code on the right shows the trick that compilers use: ten times x is eight times x plus two times x, two shifts and an addition.
+UNDERSTAND NOW: shifts as multiplications.
 For the lecturer: You used slli t1, t1, 2 in Lecture 04 to multiply an array index by four. Shifts are also the basis of fixed-point arithmetic (Lecture 06).</a:t>
             </a:r>
             <a:endParaRPr lang="en-US" dirty="0"/>
@@ -1917,6 +1930,7 @@
             <a:r>
               <a:rPr lang="en-US" dirty="0"/>
               <a:t>To change the sign of a number there are two methods. First: complement every bit, then add 1; six, 0110, becomes 1001 and then 1010, minus six. Second, faster by hand: starting from the right, copy the bits up to and including the first 1, and complement all the others. The code shows that RISC-V does not even need an instruction for this: neg is a pseudo-instruction for sub from the register zero. One exception: the most negative number has no positive partner, and negating it returns the number itself.
+UNDERSTAND NOW: two's complement.
 For the lecturer: Why method 1 works: the complement of x is (2^n - 1) - x, so adding 1 gives 2^n - x. The source slide described method 2 'from the left'; the rule scans from the right.</a:t>
             </a:r>
             <a:endParaRPr lang="en-US" dirty="0"/>
@@ -2006,6 +2020,7 @@
             <a:r>
               <a:rPr lang="en-US" dirty="0"/>
               <a:t>Now the warm-up can be explained completely. The marker was at 0, and addi with minus 1 moved one step back on a wheel of 2 to the 32 positions: the register now holds thirty-two ones. Read as unsigned they are 4,294,967,295; in two's complement they are minus 1. The function that prints shows the pattern and takes no side. The marker disappears because it is drawn off the screen in both readings. It was never a bug of the processor: the program lacked a decision.
+UNDERSTAND NOW: signed or unsigned instructions.
 For the lecturer: Not a bug in the processor: a missing decision in the program. The fix is on the next slides.</a:t>
             </a:r>
             <a:endParaRPr lang="en-US" dirty="0"/>
@@ -2095,6 +2110,7 @@
             <a:r>
               <a:rPr lang="en-US" dirty="0"/>
               <a:t>RISC-V registers have no type: thirty-two bits are signed or unsigned only for the instruction that reads them. The table shows where the two readings need different instructions. Addition, subtraction and the low part of a product are the same. Comparisons, branches, right shifts, loads of a byte, and division come in pairs: slt and sltu, blt and bltu, sra and srl, lb and lbu, div and divu. The letter u in the name always means unsigned. Choosing the wrong member of a pair is a classic error.
+UNDERSTAND NOW: signed or unsigned instructions.
 For the lecturer: RISC-V registers have no type. The same 32 bits are signed or unsigned only in the eye of the instruction that reads them.</a:t>
             </a:r>
             <a:endParaRPr lang="en-US" dirty="0"/>
@@ -2184,6 +2200,7 @@
             <a:r>
               <a:rPr lang="en-US" dirty="0"/>
               <a:t>The corrected program keeps the marker on the screen. After the two possible steps, bgez asks whether the position is greater than or equal to zero, reading it as a signed number: if not, the position is set to 0. Then ble compares it with the maximum, 304, again as signed, and limits it. This is called clamping. Note the method: a game does not detect the overflow afterwards; it keeps its values inside a range where overflow cannot happen. One sw at the end stores the adjusted value.
+UNDERSTAND NOW: signed or unsigned instructions.
 For the lecturer: Source: textbook lab 06-asm-state-and-input, step3_clamp.S. Ask what happens with bgeu or bltu instead: an instructive bug to try.</a:t>
             </a:r>
             <a:endParaRPr lang="en-US" dirty="0"/>
@@ -2273,6 +2290,7 @@
             <a:r>
               <a:rPr lang="en-US" dirty="0"/>
               <a:t>Many processors have a carry flag and an overflow flag; RISC-V has neither, and an overflow is detected with a comparison. Unsigned: after add, if the sum is smaller than one of the operands, the sum has wrapped around; sltu tests it in one instruction. Signed: adding a negative number must make the sum smaller, adding a non-negative one must not; if the two facts disagree, there was an overflow. Compare with the wheel: the first test detects the crossing at the top, the second the crossing at the bottom.
+UNDERSTAND NOW: signed or unsigned instructions.
 For the lecturer: Both idioms are the ones suggested in the RISC-V specification. Compare with the wheel: sltu detects crossing the top, the signed test detects crossing the bottom.</a:t>
             </a:r>
             <a:endParaRPr lang="en-US" dirty="0"/>
@@ -3354,6 +3372,420 @@
       </p:pic>
       <p:sp>
         <p:nvSpPr>
+          <p:cNvPr id="14" name="Shape 11"/>
+          <p:cNvSpPr/>
+          <p:nvPr/>
+        </p:nvSpPr>
+        <p:spPr>
+          <a:xfrm>
+            <a:off x="9690303" y="91440"/>
+            <a:ext cx="1952752" cy="274320"/>
+          </a:xfrm>
+          <a:prstGeom prst="rect">
+            <a:avLst/>
+          </a:prstGeom>
+          <a:solidFill>
+            <a:srgbClr val="F3E8FF"/>
+          </a:solidFill>
+          <a:ln w="12700">
+            <a:solidFill>
+              <a:srgbClr val="7E22CE"/>
+            </a:solidFill>
+            <a:prstDash val="dash"/>
+          </a:ln>
+        </p:spPr>
+      </p:sp>
+      <p:sp>
+        <p:nvSpPr>
+          <p:cNvPr id="15" name="Shape 12"/>
+          <p:cNvSpPr/>
+          <p:nvPr/>
+        </p:nvSpPr>
+        <p:spPr>
+          <a:xfrm>
+            <a:off x="9717735" y="128016"/>
+            <a:ext cx="45720" cy="45720"/>
+          </a:xfrm>
+          <a:prstGeom prst="rect">
+            <a:avLst/>
+          </a:prstGeom>
+          <a:solidFill>
+            <a:srgbClr val="7E22CE"/>
+          </a:solidFill>
+          <a:ln w="12700">
+            <a:solidFill>
+              <a:srgbClr val="7E22CE"/>
+            </a:solidFill>
+            <a:prstDash val="solid"/>
+          </a:ln>
+        </p:spPr>
+      </p:sp>
+      <p:sp>
+        <p:nvSpPr>
+          <p:cNvPr id="16" name="Shape 13"/>
+          <p:cNvSpPr/>
+          <p:nvPr/>
+        </p:nvSpPr>
+        <p:spPr>
+          <a:xfrm>
+            <a:off x="9717735" y="205740"/>
+            <a:ext cx="45720" cy="45720"/>
+          </a:xfrm>
+          <a:prstGeom prst="rect">
+            <a:avLst/>
+          </a:prstGeom>
+          <a:solidFill>
+            <a:srgbClr val="7E22CE"/>
+          </a:solidFill>
+          <a:ln w="12700">
+            <a:solidFill>
+              <a:srgbClr val="7E22CE"/>
+            </a:solidFill>
+            <a:prstDash val="solid"/>
+          </a:ln>
+        </p:spPr>
+      </p:sp>
+      <p:sp>
+        <p:nvSpPr>
+          <p:cNvPr id="17" name="Shape 14"/>
+          <p:cNvSpPr/>
+          <p:nvPr/>
+        </p:nvSpPr>
+        <p:spPr>
+          <a:xfrm>
+            <a:off x="9717735" y="283464"/>
+            <a:ext cx="45720" cy="45720"/>
+          </a:xfrm>
+          <a:prstGeom prst="rect">
+            <a:avLst/>
+          </a:prstGeom>
+          <a:solidFill>
+            <a:srgbClr val="7E22CE"/>
+          </a:solidFill>
+          <a:ln w="12700">
+            <a:solidFill>
+              <a:srgbClr val="7E22CE"/>
+            </a:solidFill>
+            <a:prstDash val="solid"/>
+          </a:ln>
+        </p:spPr>
+      </p:sp>
+      <p:pic>
+        <p:nvPicPr>
+          <p:cNvPr id="18" name="Image 1" descr="preencoded.png">    </p:cNvPr>
+          <p:cNvPicPr>
+            <a:picLocks noChangeAspect="1"/>
+          </p:cNvPicPr>
+          <p:nvPr/>
+        </p:nvPicPr>
+        <p:blipFill>
+          <a:blip r:embed="rId2"/>
+          <a:stretch>
+            <a:fillRect/>
+          </a:stretch>
+        </p:blipFill>
+        <p:spPr>
+          <a:xfrm>
+            <a:off x="9818319" y="128016"/>
+            <a:ext cx="201168" cy="201168"/>
+          </a:xfrm>
+          <a:prstGeom prst="rect">
+            <a:avLst/>
+          </a:prstGeom>
+        </p:spPr>
+      </p:pic>
+      <p:sp>
+        <p:nvSpPr>
+          <p:cNvPr id="19" name="Text 15"/>
+          <p:cNvSpPr txBox="1"/>
+          <p:nvPr/>
+        </p:nvSpPr>
+        <p:spPr>
+          <a:xfrm>
+            <a:off x="10074351" y="91440"/>
+            <a:ext cx="1532128" cy="274320"/>
+          </a:xfrm>
+          <a:prstGeom prst="rect">
+            <a:avLst/>
+          </a:prstGeom>
+          <a:noFill/>
+          <a:ln/>
+        </p:spPr>
+        <p:txBody>
+          <a:bodyPr wrap="square" lIns="0" tIns="0" rIns="0" bIns="0" rtlCol="0" anchor="ctr"/>
+          <a:lstStyle/>
+          <a:p>
+            <a:pPr indent="0" marL="0">
+              <a:buNone/>
+            </a:pPr>
+            <a:r>
+              <a:rPr lang="en-US" sz="1100" b="1" dirty="0">
+                <a:solidFill>
+                  <a:srgbClr val="6B21A8"/>
+                </a:solidFill>
+                <a:latin typeface="Calibri" pitchFamily="34" charset="0"/>
+                <a:ea typeface="Calibri" pitchFamily="34" charset="-122"/>
+                <a:cs typeface="Calibri" pitchFamily="34" charset="-120"/>
+              </a:rPr>
+              <a:t>UNDERSTAND LATER</a:t>
+            </a:r>
+            <a:endParaRPr lang="en-US" sz="1100" dirty="0"/>
+          </a:p>
+        </p:txBody>
+      </p:sp>
+      <p:sp>
+        <p:nvSpPr>
+          <p:cNvPr id="20" name="Shape 16"/>
+          <p:cNvSpPr/>
+          <p:nvPr/>
+        </p:nvSpPr>
+        <p:spPr>
+          <a:xfrm>
+            <a:off x="8407349" y="91440"/>
+            <a:ext cx="1173226" cy="274320"/>
+          </a:xfrm>
+          <a:prstGeom prst="rect">
+            <a:avLst/>
+          </a:prstGeom>
+          <a:solidFill>
+            <a:srgbClr val="FEF3C7"/>
+          </a:solidFill>
+          <a:ln w="12700">
+            <a:solidFill>
+              <a:srgbClr val="B45309"/>
+            </a:solidFill>
+            <a:prstDash val="solid"/>
+          </a:ln>
+        </p:spPr>
+      </p:sp>
+      <p:sp>
+        <p:nvSpPr>
+          <p:cNvPr id="21" name="Shape 17"/>
+          <p:cNvSpPr/>
+          <p:nvPr/>
+        </p:nvSpPr>
+        <p:spPr>
+          <a:xfrm>
+            <a:off x="8407349" y="91440"/>
+            <a:ext cx="27432" cy="274320"/>
+          </a:xfrm>
+          <a:prstGeom prst="rect">
+            <a:avLst/>
+          </a:prstGeom>
+          <a:solidFill>
+            <a:srgbClr val="B45309"/>
+          </a:solidFill>
+          <a:ln w="12700">
+            <a:solidFill>
+              <a:srgbClr val="B45309"/>
+            </a:solidFill>
+            <a:prstDash val="solid"/>
+          </a:ln>
+        </p:spPr>
+      </p:sp>
+      <p:sp>
+        <p:nvSpPr>
+          <p:cNvPr id="22" name="Shape 18"/>
+          <p:cNvSpPr/>
+          <p:nvPr/>
+        </p:nvSpPr>
+        <p:spPr>
+          <a:xfrm>
+            <a:off x="8462213" y="91440"/>
+            <a:ext cx="27432" cy="274320"/>
+          </a:xfrm>
+          <a:prstGeom prst="rect">
+            <a:avLst/>
+          </a:prstGeom>
+          <a:solidFill>
+            <a:srgbClr val="B45309"/>
+          </a:solidFill>
+          <a:ln w="12700">
+            <a:solidFill>
+              <a:srgbClr val="B45309"/>
+            </a:solidFill>
+            <a:prstDash val="solid"/>
+          </a:ln>
+        </p:spPr>
+      </p:sp>
+      <p:pic>
+        <p:nvPicPr>
+          <p:cNvPr id="23" name="Image 2" descr="preencoded.png">    </p:cNvPr>
+          <p:cNvPicPr>
+            <a:picLocks noChangeAspect="1"/>
+          </p:cNvPicPr>
+          <p:nvPr/>
+        </p:nvPicPr>
+        <p:blipFill>
+          <a:blip r:embed="rId3"/>
+          <a:stretch>
+            <a:fillRect/>
+          </a:stretch>
+        </p:blipFill>
+        <p:spPr>
+          <a:xfrm>
+            <a:off x="8535365" y="128016"/>
+            <a:ext cx="201168" cy="201168"/>
+          </a:xfrm>
+          <a:prstGeom prst="rect">
+            <a:avLst/>
+          </a:prstGeom>
+        </p:spPr>
+      </p:pic>
+      <p:sp>
+        <p:nvSpPr>
+          <p:cNvPr id="24" name="Text 19"/>
+          <p:cNvSpPr txBox="1"/>
+          <p:nvPr/>
+        </p:nvSpPr>
+        <p:spPr>
+          <a:xfrm>
+            <a:off x="8791397" y="91440"/>
+            <a:ext cx="752602" cy="274320"/>
+          </a:xfrm>
+          <a:prstGeom prst="rect">
+            <a:avLst/>
+          </a:prstGeom>
+          <a:noFill/>
+          <a:ln/>
+        </p:spPr>
+        <p:txBody>
+          <a:bodyPr wrap="square" lIns="0" tIns="0" rIns="0" bIns="0" rtlCol="0" anchor="ctr"/>
+          <a:lstStyle/>
+          <a:p>
+            <a:pPr indent="0" marL="0">
+              <a:buNone/>
+            </a:pPr>
+            <a:r>
+              <a:rPr lang="en-US" sz="1100" b="1" dirty="0">
+                <a:solidFill>
+                  <a:srgbClr val="92400E"/>
+                </a:solidFill>
+                <a:latin typeface="Calibri" pitchFamily="34" charset="0"/>
+                <a:ea typeface="Calibri" pitchFamily="34" charset="-122"/>
+                <a:cs typeface="Calibri" pitchFamily="34" charset="-120"/>
+              </a:rPr>
+              <a:t>USE NOW</a:t>
+            </a:r>
+            <a:endParaRPr lang="en-US" sz="1100" dirty="0"/>
+          </a:p>
+        </p:txBody>
+      </p:sp>
+      <p:sp>
+        <p:nvSpPr>
+          <p:cNvPr id="25" name="Shape 20"/>
+          <p:cNvSpPr/>
+          <p:nvPr/>
+        </p:nvSpPr>
+        <p:spPr>
+          <a:xfrm>
+            <a:off x="6518097" y="91440"/>
+            <a:ext cx="1779524" cy="274320"/>
+          </a:xfrm>
+          <a:prstGeom prst="rect">
+            <a:avLst/>
+          </a:prstGeom>
+          <a:solidFill>
+            <a:srgbClr val="E0F2FE"/>
+          </a:solidFill>
+          <a:ln w="12700">
+            <a:solidFill>
+              <a:srgbClr val="0369A1"/>
+            </a:solidFill>
+            <a:prstDash val="solid"/>
+          </a:ln>
+        </p:spPr>
+      </p:sp>
+      <p:sp>
+        <p:nvSpPr>
+          <p:cNvPr id="26" name="Shape 21"/>
+          <p:cNvSpPr/>
+          <p:nvPr/>
+        </p:nvSpPr>
+        <p:spPr>
+          <a:xfrm>
+            <a:off x="6518097" y="91440"/>
+            <a:ext cx="73152" cy="274320"/>
+          </a:xfrm>
+          <a:prstGeom prst="rect">
+            <a:avLst/>
+          </a:prstGeom>
+          <a:solidFill>
+            <a:srgbClr val="0369A1"/>
+          </a:solidFill>
+          <a:ln w="12700">
+            <a:solidFill>
+              <a:srgbClr val="0369A1"/>
+            </a:solidFill>
+            <a:prstDash val="solid"/>
+          </a:ln>
+        </p:spPr>
+      </p:sp>
+      <p:pic>
+        <p:nvPicPr>
+          <p:cNvPr id="27" name="Image 3" descr="preencoded.png">    </p:cNvPr>
+          <p:cNvPicPr>
+            <a:picLocks noChangeAspect="1"/>
+          </p:cNvPicPr>
+          <p:nvPr/>
+        </p:nvPicPr>
+        <p:blipFill>
+          <a:blip r:embed="rId4"/>
+          <a:stretch>
+            <a:fillRect/>
+          </a:stretch>
+        </p:blipFill>
+        <p:spPr>
+          <a:xfrm>
+            <a:off x="6646113" y="128016"/>
+            <a:ext cx="201168" cy="201168"/>
+          </a:xfrm>
+          <a:prstGeom prst="rect">
+            <a:avLst/>
+          </a:prstGeom>
+        </p:spPr>
+      </p:pic>
+      <p:sp>
+        <p:nvSpPr>
+          <p:cNvPr id="28" name="Text 22"/>
+          <p:cNvSpPr txBox="1"/>
+          <p:nvPr/>
+        </p:nvSpPr>
+        <p:spPr>
+          <a:xfrm>
+            <a:off x="6902145" y="91440"/>
+            <a:ext cx="1358900" cy="274320"/>
+          </a:xfrm>
+          <a:prstGeom prst="rect">
+            <a:avLst/>
+          </a:prstGeom>
+          <a:noFill/>
+          <a:ln/>
+        </p:spPr>
+        <p:txBody>
+          <a:bodyPr wrap="square" lIns="0" tIns="0" rIns="0" bIns="0" rtlCol="0" anchor="ctr"/>
+          <a:lstStyle/>
+          <a:p>
+            <a:pPr indent="0" marL="0">
+              <a:buNone/>
+            </a:pPr>
+            <a:r>
+              <a:rPr lang="en-US" sz="1100" b="1" dirty="0">
+                <a:solidFill>
+                  <a:srgbClr val="075985"/>
+                </a:solidFill>
+                <a:latin typeface="Calibri" pitchFamily="34" charset="0"/>
+                <a:ea typeface="Calibri" pitchFamily="34" charset="-122"/>
+                <a:cs typeface="Calibri" pitchFamily="34" charset="-120"/>
+              </a:rPr>
+              <a:t>UNDERSTAND NOW</a:t>
+            </a:r>
+            <a:endParaRPr lang="en-US" sz="1100" dirty="0"/>
+          </a:p>
+        </p:txBody>
+      </p:sp>
+      <p:sp>
+        <p:nvSpPr>
           <p:cNvPr id="25" name="Slide Number Placeholder 0"/>
           <p:cNvSpPr>
             <a:spLocks noGrp="1"/>
@@ -3891,6 +4323,158 @@
       </p:sp>
       <p:sp>
         <p:nvSpPr>
+          <p:cNvPr id="5" name="Shape 3"/>
+          <p:cNvSpPr/>
+          <p:nvPr/>
+        </p:nvSpPr>
+        <p:spPr>
+          <a:xfrm>
+            <a:off x="8959672" y="91440"/>
+            <a:ext cx="2683383" cy="274320"/>
+          </a:xfrm>
+          <a:prstGeom prst="rect">
+            <a:avLst/>
+          </a:prstGeom>
+          <a:solidFill>
+            <a:srgbClr val="FEF3C7"/>
+          </a:solidFill>
+          <a:ln w="12700">
+            <a:solidFill>
+              <a:srgbClr val="B45309"/>
+            </a:solidFill>
+            <a:prstDash val="solid"/>
+          </a:ln>
+        </p:spPr>
+      </p:sp>
+      <p:sp>
+        <p:nvSpPr>
+          <p:cNvPr id="6" name="Shape 4"/>
+          <p:cNvSpPr/>
+          <p:nvPr/>
+        </p:nvSpPr>
+        <p:spPr>
+          <a:xfrm>
+            <a:off x="8959672" y="91440"/>
+            <a:ext cx="27432" cy="274320"/>
+          </a:xfrm>
+          <a:prstGeom prst="rect">
+            <a:avLst/>
+          </a:prstGeom>
+          <a:solidFill>
+            <a:srgbClr val="B45309"/>
+          </a:solidFill>
+          <a:ln w="12700">
+            <a:solidFill>
+              <a:srgbClr val="B45309"/>
+            </a:solidFill>
+            <a:prstDash val="solid"/>
+          </a:ln>
+        </p:spPr>
+      </p:sp>
+      <p:sp>
+        <p:nvSpPr>
+          <p:cNvPr id="7" name="Shape 5"/>
+          <p:cNvSpPr/>
+          <p:nvPr/>
+        </p:nvSpPr>
+        <p:spPr>
+          <a:xfrm>
+            <a:off x="9014536" y="91440"/>
+            <a:ext cx="27432" cy="274320"/>
+          </a:xfrm>
+          <a:prstGeom prst="rect">
+            <a:avLst/>
+          </a:prstGeom>
+          <a:solidFill>
+            <a:srgbClr val="B45309"/>
+          </a:solidFill>
+          <a:ln w="12700">
+            <a:solidFill>
+              <a:srgbClr val="B45309"/>
+            </a:solidFill>
+            <a:prstDash val="solid"/>
+          </a:ln>
+        </p:spPr>
+      </p:sp>
+      <p:pic>
+        <p:nvPicPr>
+          <p:cNvPr id="8" name="Image 0" descr="preencoded.png">    </p:cNvPr>
+          <p:cNvPicPr>
+            <a:picLocks noChangeAspect="1"/>
+          </p:cNvPicPr>
+          <p:nvPr/>
+        </p:nvPicPr>
+        <p:blipFill>
+          <a:blip r:embed="rId1"/>
+          <a:stretch>
+            <a:fillRect/>
+          </a:stretch>
+        </p:blipFill>
+        <p:spPr>
+          <a:xfrm>
+            <a:off x="9087688" y="128016"/>
+            <a:ext cx="201168" cy="201168"/>
+          </a:xfrm>
+          <a:prstGeom prst="rect">
+            <a:avLst/>
+          </a:prstGeom>
+        </p:spPr>
+      </p:pic>
+      <p:sp>
+        <p:nvSpPr>
+          <p:cNvPr id="9" name="Text 6"/>
+          <p:cNvSpPr txBox="1"/>
+          <p:nvPr/>
+        </p:nvSpPr>
+        <p:spPr>
+          <a:xfrm>
+            <a:off x="9343720" y="91440"/>
+            <a:ext cx="2262759" cy="274320"/>
+          </a:xfrm>
+          <a:prstGeom prst="rect">
+            <a:avLst/>
+          </a:prstGeom>
+          <a:noFill/>
+          <a:ln/>
+        </p:spPr>
+        <p:txBody>
+          <a:bodyPr wrap="square" lIns="0" tIns="0" rIns="0" bIns="0" rtlCol="0" anchor="ctr"/>
+          <a:lstStyle/>
+          <a:p>
+            <a:pPr indent="0" marL="0">
+              <a:buNone/>
+            </a:pPr>
+            <a:r>
+              <a:rPr lang="en-US" sz="1100" b="1" dirty="0">
+                <a:solidFill>
+                  <a:srgbClr val="92400E"/>
+                </a:solidFill>
+                <a:latin typeface="Calibri" pitchFamily="34" charset="0"/>
+                <a:ea typeface="Calibri" pitchFamily="34" charset="-122"/>
+                <a:cs typeface="Calibri" pitchFamily="34" charset="-120"/>
+              </a:rPr>
+              <a:t>USE NOW</a:t>
+            </a:r>
+            <a:pPr indent="0" marL="0">
+              <a:buNone/>
+            </a:pPr>
+            <a:r>
+              <a:rPr lang="en-US" sz="1100" dirty="0">
+                <a:solidFill>
+                  <a:srgbClr val="92400E"/>
+                </a:solidFill>
+                <a:latin typeface="Calibri" pitchFamily="34" charset="0"/>
+                <a:ea typeface="Calibri" pitchFamily="34" charset="-122"/>
+                <a:cs typeface="Calibri" pitchFamily="34" charset="-120"/>
+              </a:rPr>
+              <a:t> · the complete program</a:t>
+            </a:r>
+            <a:endParaRPr lang="en-US" sz="1100" dirty="0"/>
+          </a:p>
+        </p:txBody>
+      </p:sp>
+      <p:sp>
+        <p:nvSpPr>
           <p:cNvPr id="25" name="Slide Number Placeholder 0"/>
           <p:cNvSpPr>
             <a:spLocks noGrp="1"/>
@@ -4365,6 +4949,158 @@
       </p:sp>
       <p:sp>
         <p:nvSpPr>
+          <p:cNvPr id="5" name="Shape 3"/>
+          <p:cNvSpPr/>
+          <p:nvPr/>
+        </p:nvSpPr>
+        <p:spPr>
+          <a:xfrm>
+            <a:off x="8959672" y="91440"/>
+            <a:ext cx="2683383" cy="274320"/>
+          </a:xfrm>
+          <a:prstGeom prst="rect">
+            <a:avLst/>
+          </a:prstGeom>
+          <a:solidFill>
+            <a:srgbClr val="FEF3C7"/>
+          </a:solidFill>
+          <a:ln w="12700">
+            <a:solidFill>
+              <a:srgbClr val="B45309"/>
+            </a:solidFill>
+            <a:prstDash val="solid"/>
+          </a:ln>
+        </p:spPr>
+      </p:sp>
+      <p:sp>
+        <p:nvSpPr>
+          <p:cNvPr id="6" name="Shape 4"/>
+          <p:cNvSpPr/>
+          <p:nvPr/>
+        </p:nvSpPr>
+        <p:spPr>
+          <a:xfrm>
+            <a:off x="8959672" y="91440"/>
+            <a:ext cx="27432" cy="274320"/>
+          </a:xfrm>
+          <a:prstGeom prst="rect">
+            <a:avLst/>
+          </a:prstGeom>
+          <a:solidFill>
+            <a:srgbClr val="B45309"/>
+          </a:solidFill>
+          <a:ln w="12700">
+            <a:solidFill>
+              <a:srgbClr val="B45309"/>
+            </a:solidFill>
+            <a:prstDash val="solid"/>
+          </a:ln>
+        </p:spPr>
+      </p:sp>
+      <p:sp>
+        <p:nvSpPr>
+          <p:cNvPr id="7" name="Shape 5"/>
+          <p:cNvSpPr/>
+          <p:nvPr/>
+        </p:nvSpPr>
+        <p:spPr>
+          <a:xfrm>
+            <a:off x="9014536" y="91440"/>
+            <a:ext cx="27432" cy="274320"/>
+          </a:xfrm>
+          <a:prstGeom prst="rect">
+            <a:avLst/>
+          </a:prstGeom>
+          <a:solidFill>
+            <a:srgbClr val="B45309"/>
+          </a:solidFill>
+          <a:ln w="12700">
+            <a:solidFill>
+              <a:srgbClr val="B45309"/>
+            </a:solidFill>
+            <a:prstDash val="solid"/>
+          </a:ln>
+        </p:spPr>
+      </p:sp>
+      <p:pic>
+        <p:nvPicPr>
+          <p:cNvPr id="8" name="Image 0" descr="preencoded.png">    </p:cNvPr>
+          <p:cNvPicPr>
+            <a:picLocks noChangeAspect="1"/>
+          </p:cNvPicPr>
+          <p:nvPr/>
+        </p:nvPicPr>
+        <p:blipFill>
+          <a:blip r:embed="rId1"/>
+          <a:stretch>
+            <a:fillRect/>
+          </a:stretch>
+        </p:blipFill>
+        <p:spPr>
+          <a:xfrm>
+            <a:off x="9087688" y="128016"/>
+            <a:ext cx="201168" cy="201168"/>
+          </a:xfrm>
+          <a:prstGeom prst="rect">
+            <a:avLst/>
+          </a:prstGeom>
+        </p:spPr>
+      </p:pic>
+      <p:sp>
+        <p:nvSpPr>
+          <p:cNvPr id="9" name="Text 6"/>
+          <p:cNvSpPr txBox="1"/>
+          <p:nvPr/>
+        </p:nvSpPr>
+        <p:spPr>
+          <a:xfrm>
+            <a:off x="9343720" y="91440"/>
+            <a:ext cx="2262759" cy="274320"/>
+          </a:xfrm>
+          <a:prstGeom prst="rect">
+            <a:avLst/>
+          </a:prstGeom>
+          <a:noFill/>
+          <a:ln/>
+        </p:spPr>
+        <p:txBody>
+          <a:bodyPr wrap="square" lIns="0" tIns="0" rIns="0" bIns="0" rtlCol="0" anchor="ctr"/>
+          <a:lstStyle/>
+          <a:p>
+            <a:pPr indent="0" marL="0">
+              <a:buNone/>
+            </a:pPr>
+            <a:r>
+              <a:rPr lang="en-US" sz="1100" b="1" dirty="0">
+                <a:solidFill>
+                  <a:srgbClr val="92400E"/>
+                </a:solidFill>
+                <a:latin typeface="Calibri" pitchFamily="34" charset="0"/>
+                <a:ea typeface="Calibri" pitchFamily="34" charset="-122"/>
+                <a:cs typeface="Calibri" pitchFamily="34" charset="-120"/>
+              </a:rPr>
+              <a:t>USE NOW</a:t>
+            </a:r>
+            <a:pPr indent="0" marL="0">
+              <a:buNone/>
+            </a:pPr>
+            <a:r>
+              <a:rPr lang="en-US" sz="1100" dirty="0">
+                <a:solidFill>
+                  <a:srgbClr val="92400E"/>
+                </a:solidFill>
+                <a:latin typeface="Calibri" pitchFamily="34" charset="0"/>
+                <a:ea typeface="Calibri" pitchFamily="34" charset="-122"/>
+                <a:cs typeface="Calibri" pitchFamily="34" charset="-120"/>
+              </a:rPr>
+              <a:t> · the complete program</a:t>
+            </a:r>
+            <a:endParaRPr lang="en-US" sz="1100" dirty="0"/>
+          </a:p>
+        </p:txBody>
+      </p:sp>
+      <p:sp>
+        <p:nvSpPr>
           <p:cNvPr id="25" name="Slide Number Placeholder 0"/>
           <p:cNvSpPr>
             <a:spLocks noGrp="1"/>
@@ -4856,6 +5592,158 @@
       </p:sp>
       <p:sp>
         <p:nvSpPr>
+          <p:cNvPr id="5" name="Shape 3"/>
+          <p:cNvSpPr/>
+          <p:nvPr/>
+        </p:nvSpPr>
+        <p:spPr>
+          <a:xfrm>
+            <a:off x="8959672" y="91440"/>
+            <a:ext cx="2683383" cy="274320"/>
+          </a:xfrm>
+          <a:prstGeom prst="rect">
+            <a:avLst/>
+          </a:prstGeom>
+          <a:solidFill>
+            <a:srgbClr val="FEF3C7"/>
+          </a:solidFill>
+          <a:ln w="12700">
+            <a:solidFill>
+              <a:srgbClr val="B45309"/>
+            </a:solidFill>
+            <a:prstDash val="solid"/>
+          </a:ln>
+        </p:spPr>
+      </p:sp>
+      <p:sp>
+        <p:nvSpPr>
+          <p:cNvPr id="6" name="Shape 4"/>
+          <p:cNvSpPr/>
+          <p:nvPr/>
+        </p:nvSpPr>
+        <p:spPr>
+          <a:xfrm>
+            <a:off x="8959672" y="91440"/>
+            <a:ext cx="27432" cy="274320"/>
+          </a:xfrm>
+          <a:prstGeom prst="rect">
+            <a:avLst/>
+          </a:prstGeom>
+          <a:solidFill>
+            <a:srgbClr val="B45309"/>
+          </a:solidFill>
+          <a:ln w="12700">
+            <a:solidFill>
+              <a:srgbClr val="B45309"/>
+            </a:solidFill>
+            <a:prstDash val="solid"/>
+          </a:ln>
+        </p:spPr>
+      </p:sp>
+      <p:sp>
+        <p:nvSpPr>
+          <p:cNvPr id="7" name="Shape 5"/>
+          <p:cNvSpPr/>
+          <p:nvPr/>
+        </p:nvSpPr>
+        <p:spPr>
+          <a:xfrm>
+            <a:off x="9014536" y="91440"/>
+            <a:ext cx="27432" cy="274320"/>
+          </a:xfrm>
+          <a:prstGeom prst="rect">
+            <a:avLst/>
+          </a:prstGeom>
+          <a:solidFill>
+            <a:srgbClr val="B45309"/>
+          </a:solidFill>
+          <a:ln w="12700">
+            <a:solidFill>
+              <a:srgbClr val="B45309"/>
+            </a:solidFill>
+            <a:prstDash val="solid"/>
+          </a:ln>
+        </p:spPr>
+      </p:sp>
+      <p:pic>
+        <p:nvPicPr>
+          <p:cNvPr id="8" name="Image 0" descr="preencoded.png">    </p:cNvPr>
+          <p:cNvPicPr>
+            <a:picLocks noChangeAspect="1"/>
+          </p:cNvPicPr>
+          <p:nvPr/>
+        </p:nvPicPr>
+        <p:blipFill>
+          <a:blip r:embed="rId1"/>
+          <a:stretch>
+            <a:fillRect/>
+          </a:stretch>
+        </p:blipFill>
+        <p:spPr>
+          <a:xfrm>
+            <a:off x="9087688" y="128016"/>
+            <a:ext cx="201168" cy="201168"/>
+          </a:xfrm>
+          <a:prstGeom prst="rect">
+            <a:avLst/>
+          </a:prstGeom>
+        </p:spPr>
+      </p:pic>
+      <p:sp>
+        <p:nvSpPr>
+          <p:cNvPr id="9" name="Text 6"/>
+          <p:cNvSpPr txBox="1"/>
+          <p:nvPr/>
+        </p:nvSpPr>
+        <p:spPr>
+          <a:xfrm>
+            <a:off x="9343720" y="91440"/>
+            <a:ext cx="2262759" cy="274320"/>
+          </a:xfrm>
+          <a:prstGeom prst="rect">
+            <a:avLst/>
+          </a:prstGeom>
+          <a:noFill/>
+          <a:ln/>
+        </p:spPr>
+        <p:txBody>
+          <a:bodyPr wrap="square" lIns="0" tIns="0" rIns="0" bIns="0" rtlCol="0" anchor="ctr"/>
+          <a:lstStyle/>
+          <a:p>
+            <a:pPr indent="0" marL="0">
+              <a:buNone/>
+            </a:pPr>
+            <a:r>
+              <a:rPr lang="en-US" sz="1100" b="1" dirty="0">
+                <a:solidFill>
+                  <a:srgbClr val="92400E"/>
+                </a:solidFill>
+                <a:latin typeface="Calibri" pitchFamily="34" charset="0"/>
+                <a:ea typeface="Calibri" pitchFamily="34" charset="-122"/>
+                <a:cs typeface="Calibri" pitchFamily="34" charset="-120"/>
+              </a:rPr>
+              <a:t>USE NOW</a:t>
+            </a:r>
+            <a:pPr indent="0" marL="0">
+              <a:buNone/>
+            </a:pPr>
+            <a:r>
+              <a:rPr lang="en-US" sz="1100" dirty="0">
+                <a:solidFill>
+                  <a:srgbClr val="92400E"/>
+                </a:solidFill>
+                <a:latin typeface="Calibri" pitchFamily="34" charset="0"/>
+                <a:ea typeface="Calibri" pitchFamily="34" charset="-122"/>
+                <a:cs typeface="Calibri" pitchFamily="34" charset="-120"/>
+              </a:rPr>
+              <a:t> · the complete program</a:t>
+            </a:r>
+            <a:endParaRPr lang="en-US" sz="1100" dirty="0"/>
+          </a:p>
+        </p:txBody>
+      </p:sp>
+      <p:sp>
+        <p:nvSpPr>
           <p:cNvPr id="25" name="Slide Number Placeholder 0"/>
           <p:cNvSpPr>
             <a:spLocks noGrp="1"/>
@@ -5567,6 +6455,158 @@
       </p:sp>
       <p:sp>
         <p:nvSpPr>
+          <p:cNvPr id="5" name="Shape 3"/>
+          <p:cNvSpPr/>
+          <p:nvPr/>
+        </p:nvSpPr>
+        <p:spPr>
+          <a:xfrm>
+            <a:off x="8959672" y="91440"/>
+            <a:ext cx="2683383" cy="274320"/>
+          </a:xfrm>
+          <a:prstGeom prst="rect">
+            <a:avLst/>
+          </a:prstGeom>
+          <a:solidFill>
+            <a:srgbClr val="FEF3C7"/>
+          </a:solidFill>
+          <a:ln w="12700">
+            <a:solidFill>
+              <a:srgbClr val="B45309"/>
+            </a:solidFill>
+            <a:prstDash val="solid"/>
+          </a:ln>
+        </p:spPr>
+      </p:sp>
+      <p:sp>
+        <p:nvSpPr>
+          <p:cNvPr id="6" name="Shape 4"/>
+          <p:cNvSpPr/>
+          <p:nvPr/>
+        </p:nvSpPr>
+        <p:spPr>
+          <a:xfrm>
+            <a:off x="8959672" y="91440"/>
+            <a:ext cx="27432" cy="274320"/>
+          </a:xfrm>
+          <a:prstGeom prst="rect">
+            <a:avLst/>
+          </a:prstGeom>
+          <a:solidFill>
+            <a:srgbClr val="B45309"/>
+          </a:solidFill>
+          <a:ln w="12700">
+            <a:solidFill>
+              <a:srgbClr val="B45309"/>
+            </a:solidFill>
+            <a:prstDash val="solid"/>
+          </a:ln>
+        </p:spPr>
+      </p:sp>
+      <p:sp>
+        <p:nvSpPr>
+          <p:cNvPr id="7" name="Shape 5"/>
+          <p:cNvSpPr/>
+          <p:nvPr/>
+        </p:nvSpPr>
+        <p:spPr>
+          <a:xfrm>
+            <a:off x="9014536" y="91440"/>
+            <a:ext cx="27432" cy="274320"/>
+          </a:xfrm>
+          <a:prstGeom prst="rect">
+            <a:avLst/>
+          </a:prstGeom>
+          <a:solidFill>
+            <a:srgbClr val="B45309"/>
+          </a:solidFill>
+          <a:ln w="12700">
+            <a:solidFill>
+              <a:srgbClr val="B45309"/>
+            </a:solidFill>
+            <a:prstDash val="solid"/>
+          </a:ln>
+        </p:spPr>
+      </p:sp>
+      <p:pic>
+        <p:nvPicPr>
+          <p:cNvPr id="8" name="Image 0" descr="preencoded.png">    </p:cNvPr>
+          <p:cNvPicPr>
+            <a:picLocks noChangeAspect="1"/>
+          </p:cNvPicPr>
+          <p:nvPr/>
+        </p:nvPicPr>
+        <p:blipFill>
+          <a:blip r:embed="rId1"/>
+          <a:stretch>
+            <a:fillRect/>
+          </a:stretch>
+        </p:blipFill>
+        <p:spPr>
+          <a:xfrm>
+            <a:off x="9087688" y="128016"/>
+            <a:ext cx="201168" cy="201168"/>
+          </a:xfrm>
+          <a:prstGeom prst="rect">
+            <a:avLst/>
+          </a:prstGeom>
+        </p:spPr>
+      </p:pic>
+      <p:sp>
+        <p:nvSpPr>
+          <p:cNvPr id="9" name="Text 6"/>
+          <p:cNvSpPr txBox="1"/>
+          <p:nvPr/>
+        </p:nvSpPr>
+        <p:spPr>
+          <a:xfrm>
+            <a:off x="9343720" y="91440"/>
+            <a:ext cx="2262759" cy="274320"/>
+          </a:xfrm>
+          <a:prstGeom prst="rect">
+            <a:avLst/>
+          </a:prstGeom>
+          <a:noFill/>
+          <a:ln/>
+        </p:spPr>
+        <p:txBody>
+          <a:bodyPr wrap="square" lIns="0" tIns="0" rIns="0" bIns="0" rtlCol="0" anchor="ctr"/>
+          <a:lstStyle/>
+          <a:p>
+            <a:pPr indent="0" marL="0">
+              <a:buNone/>
+            </a:pPr>
+            <a:r>
+              <a:rPr lang="en-US" sz="1100" b="1" dirty="0">
+                <a:solidFill>
+                  <a:srgbClr val="92400E"/>
+                </a:solidFill>
+                <a:latin typeface="Calibri" pitchFamily="34" charset="0"/>
+                <a:ea typeface="Calibri" pitchFamily="34" charset="-122"/>
+                <a:cs typeface="Calibri" pitchFamily="34" charset="-120"/>
+              </a:rPr>
+              <a:t>USE NOW</a:t>
+            </a:r>
+            <a:pPr indent="0" marL="0">
+              <a:buNone/>
+            </a:pPr>
+            <a:r>
+              <a:rPr lang="en-US" sz="1100" dirty="0">
+                <a:solidFill>
+                  <a:srgbClr val="92400E"/>
+                </a:solidFill>
+                <a:latin typeface="Calibri" pitchFamily="34" charset="0"/>
+                <a:ea typeface="Calibri" pitchFamily="34" charset="-122"/>
+                <a:cs typeface="Calibri" pitchFamily="34" charset="-120"/>
+              </a:rPr>
+              <a:t> · the complete program</a:t>
+            </a:r>
+            <a:endParaRPr lang="en-US" sz="1100" dirty="0"/>
+          </a:p>
+        </p:txBody>
+      </p:sp>
+      <p:sp>
+        <p:nvSpPr>
           <p:cNvPr id="25" name="Slide Number Placeholder 0"/>
           <p:cNvSpPr>
             <a:spLocks noGrp="1"/>
@@ -5951,6 +6991,158 @@
       </p:sp>
       <p:sp>
         <p:nvSpPr>
+          <p:cNvPr id="5" name="Shape 3"/>
+          <p:cNvSpPr/>
+          <p:nvPr/>
+        </p:nvSpPr>
+        <p:spPr>
+          <a:xfrm>
+            <a:off x="8959672" y="91440"/>
+            <a:ext cx="2683383" cy="274320"/>
+          </a:xfrm>
+          <a:prstGeom prst="rect">
+            <a:avLst/>
+          </a:prstGeom>
+          <a:solidFill>
+            <a:srgbClr val="FEF3C7"/>
+          </a:solidFill>
+          <a:ln w="12700">
+            <a:solidFill>
+              <a:srgbClr val="B45309"/>
+            </a:solidFill>
+            <a:prstDash val="solid"/>
+          </a:ln>
+        </p:spPr>
+      </p:sp>
+      <p:sp>
+        <p:nvSpPr>
+          <p:cNvPr id="6" name="Shape 4"/>
+          <p:cNvSpPr/>
+          <p:nvPr/>
+        </p:nvSpPr>
+        <p:spPr>
+          <a:xfrm>
+            <a:off x="8959672" y="91440"/>
+            <a:ext cx="27432" cy="274320"/>
+          </a:xfrm>
+          <a:prstGeom prst="rect">
+            <a:avLst/>
+          </a:prstGeom>
+          <a:solidFill>
+            <a:srgbClr val="B45309"/>
+          </a:solidFill>
+          <a:ln w="12700">
+            <a:solidFill>
+              <a:srgbClr val="B45309"/>
+            </a:solidFill>
+            <a:prstDash val="solid"/>
+          </a:ln>
+        </p:spPr>
+      </p:sp>
+      <p:sp>
+        <p:nvSpPr>
+          <p:cNvPr id="7" name="Shape 5"/>
+          <p:cNvSpPr/>
+          <p:nvPr/>
+        </p:nvSpPr>
+        <p:spPr>
+          <a:xfrm>
+            <a:off x="9014536" y="91440"/>
+            <a:ext cx="27432" cy="274320"/>
+          </a:xfrm>
+          <a:prstGeom prst="rect">
+            <a:avLst/>
+          </a:prstGeom>
+          <a:solidFill>
+            <a:srgbClr val="B45309"/>
+          </a:solidFill>
+          <a:ln w="12700">
+            <a:solidFill>
+              <a:srgbClr val="B45309"/>
+            </a:solidFill>
+            <a:prstDash val="solid"/>
+          </a:ln>
+        </p:spPr>
+      </p:sp>
+      <p:pic>
+        <p:nvPicPr>
+          <p:cNvPr id="8" name="Image 0" descr="preencoded.png">    </p:cNvPr>
+          <p:cNvPicPr>
+            <a:picLocks noChangeAspect="1"/>
+          </p:cNvPicPr>
+          <p:nvPr/>
+        </p:nvPicPr>
+        <p:blipFill>
+          <a:blip r:embed="rId1"/>
+          <a:stretch>
+            <a:fillRect/>
+          </a:stretch>
+        </p:blipFill>
+        <p:spPr>
+          <a:xfrm>
+            <a:off x="9087688" y="128016"/>
+            <a:ext cx="201168" cy="201168"/>
+          </a:xfrm>
+          <a:prstGeom prst="rect">
+            <a:avLst/>
+          </a:prstGeom>
+        </p:spPr>
+      </p:pic>
+      <p:sp>
+        <p:nvSpPr>
+          <p:cNvPr id="9" name="Text 6"/>
+          <p:cNvSpPr txBox="1"/>
+          <p:nvPr/>
+        </p:nvSpPr>
+        <p:spPr>
+          <a:xfrm>
+            <a:off x="9343720" y="91440"/>
+            <a:ext cx="2262759" cy="274320"/>
+          </a:xfrm>
+          <a:prstGeom prst="rect">
+            <a:avLst/>
+          </a:prstGeom>
+          <a:noFill/>
+          <a:ln/>
+        </p:spPr>
+        <p:txBody>
+          <a:bodyPr wrap="square" lIns="0" tIns="0" rIns="0" bIns="0" rtlCol="0" anchor="ctr"/>
+          <a:lstStyle/>
+          <a:p>
+            <a:pPr indent="0" marL="0">
+              <a:buNone/>
+            </a:pPr>
+            <a:r>
+              <a:rPr lang="en-US" sz="1100" b="1" dirty="0">
+                <a:solidFill>
+                  <a:srgbClr val="92400E"/>
+                </a:solidFill>
+                <a:latin typeface="Calibri" pitchFamily="34" charset="0"/>
+                <a:ea typeface="Calibri" pitchFamily="34" charset="-122"/>
+                <a:cs typeface="Calibri" pitchFamily="34" charset="-120"/>
+              </a:rPr>
+              <a:t>USE NOW</a:t>
+            </a:r>
+            <a:pPr indent="0" marL="0">
+              <a:buNone/>
+            </a:pPr>
+            <a:r>
+              <a:rPr lang="en-US" sz="1100" dirty="0">
+                <a:solidFill>
+                  <a:srgbClr val="92400E"/>
+                </a:solidFill>
+                <a:latin typeface="Calibri" pitchFamily="34" charset="0"/>
+                <a:ea typeface="Calibri" pitchFamily="34" charset="-122"/>
+                <a:cs typeface="Calibri" pitchFamily="34" charset="-120"/>
+              </a:rPr>
+              <a:t> · the complete program</a:t>
+            </a:r>
+            <a:endParaRPr lang="en-US" sz="1100" dirty="0"/>
+          </a:p>
+        </p:txBody>
+      </p:sp>
+      <p:sp>
+        <p:nvSpPr>
           <p:cNvPr id="25" name="Slide Number Placeholder 0"/>
           <p:cNvSpPr>
             <a:spLocks noGrp="1"/>
@@ -7104,6 +8296,158 @@
       </p:sp>
       <p:sp>
         <p:nvSpPr>
+          <p:cNvPr id="17" name="Shape 15"/>
+          <p:cNvSpPr/>
+          <p:nvPr/>
+        </p:nvSpPr>
+        <p:spPr>
+          <a:xfrm>
+            <a:off x="9287967" y="91440"/>
+            <a:ext cx="2355088" cy="274320"/>
+          </a:xfrm>
+          <a:prstGeom prst="rect">
+            <a:avLst/>
+          </a:prstGeom>
+          <a:solidFill>
+            <a:srgbClr val="FEF3C7"/>
+          </a:solidFill>
+          <a:ln w="12700">
+            <a:solidFill>
+              <a:srgbClr val="B45309"/>
+            </a:solidFill>
+            <a:prstDash val="solid"/>
+          </a:ln>
+        </p:spPr>
+      </p:sp>
+      <p:sp>
+        <p:nvSpPr>
+          <p:cNvPr id="18" name="Shape 16"/>
+          <p:cNvSpPr/>
+          <p:nvPr/>
+        </p:nvSpPr>
+        <p:spPr>
+          <a:xfrm>
+            <a:off x="9287967" y="91440"/>
+            <a:ext cx="27432" cy="274320"/>
+          </a:xfrm>
+          <a:prstGeom prst="rect">
+            <a:avLst/>
+          </a:prstGeom>
+          <a:solidFill>
+            <a:srgbClr val="B45309"/>
+          </a:solidFill>
+          <a:ln w="12700">
+            <a:solidFill>
+              <a:srgbClr val="B45309"/>
+            </a:solidFill>
+            <a:prstDash val="solid"/>
+          </a:ln>
+        </p:spPr>
+      </p:sp>
+      <p:sp>
+        <p:nvSpPr>
+          <p:cNvPr id="19" name="Shape 17"/>
+          <p:cNvSpPr/>
+          <p:nvPr/>
+        </p:nvSpPr>
+        <p:spPr>
+          <a:xfrm>
+            <a:off x="9342831" y="91440"/>
+            <a:ext cx="27432" cy="274320"/>
+          </a:xfrm>
+          <a:prstGeom prst="rect">
+            <a:avLst/>
+          </a:prstGeom>
+          <a:solidFill>
+            <a:srgbClr val="B45309"/>
+          </a:solidFill>
+          <a:ln w="12700">
+            <a:solidFill>
+              <a:srgbClr val="B45309"/>
+            </a:solidFill>
+            <a:prstDash val="solid"/>
+          </a:ln>
+        </p:spPr>
+      </p:sp>
+      <p:pic>
+        <p:nvPicPr>
+          <p:cNvPr id="20" name="Image 0" descr="preencoded.png">    </p:cNvPr>
+          <p:cNvPicPr>
+            <a:picLocks noChangeAspect="1"/>
+          </p:cNvPicPr>
+          <p:nvPr/>
+        </p:nvPicPr>
+        <p:blipFill>
+          <a:blip r:embed="rId1"/>
+          <a:stretch>
+            <a:fillRect/>
+          </a:stretch>
+        </p:blipFill>
+        <p:spPr>
+          <a:xfrm>
+            <a:off x="9415983" y="128016"/>
+            <a:ext cx="201168" cy="201168"/>
+          </a:xfrm>
+          <a:prstGeom prst="rect">
+            <a:avLst/>
+          </a:prstGeom>
+        </p:spPr>
+      </p:pic>
+      <p:sp>
+        <p:nvSpPr>
+          <p:cNvPr id="21" name="Text 18"/>
+          <p:cNvSpPr txBox="1"/>
+          <p:nvPr/>
+        </p:nvSpPr>
+        <p:spPr>
+          <a:xfrm>
+            <a:off x="9672015" y="91440"/>
+            <a:ext cx="1934464" cy="274320"/>
+          </a:xfrm>
+          <a:prstGeom prst="rect">
+            <a:avLst/>
+          </a:prstGeom>
+          <a:noFill/>
+          <a:ln/>
+        </p:spPr>
+        <p:txBody>
+          <a:bodyPr wrap="square" lIns="0" tIns="0" rIns="0" bIns="0" rtlCol="0" anchor="ctr"/>
+          <a:lstStyle/>
+          <a:p>
+            <a:pPr indent="0" marL="0">
+              <a:buNone/>
+            </a:pPr>
+            <a:r>
+              <a:rPr lang="en-US" sz="1100" b="1" dirty="0">
+                <a:solidFill>
+                  <a:srgbClr val="92400E"/>
+                </a:solidFill>
+                <a:latin typeface="Calibri" pitchFamily="34" charset="0"/>
+                <a:ea typeface="Calibri" pitchFamily="34" charset="-122"/>
+                <a:cs typeface="Calibri" pitchFamily="34" charset="-120"/>
+              </a:rPr>
+              <a:t>USE NOW</a:t>
+            </a:r>
+            <a:pPr indent="0" marL="0">
+              <a:buNone/>
+            </a:pPr>
+            <a:r>
+              <a:rPr lang="en-US" sz="1100" dirty="0">
+                <a:solidFill>
+                  <a:srgbClr val="92400E"/>
+                </a:solidFill>
+                <a:latin typeface="Calibri" pitchFamily="34" charset="0"/>
+                <a:ea typeface="Calibri" pitchFamily="34" charset="-122"/>
+                <a:cs typeface="Calibri" pitchFamily="34" charset="-120"/>
+              </a:rPr>
+              <a:t> · the PRG32 tools</a:t>
+            </a:r>
+            <a:endParaRPr lang="en-US" sz="1100" dirty="0"/>
+          </a:p>
+        </p:txBody>
+      </p:sp>
+      <p:sp>
+        <p:nvSpPr>
           <p:cNvPr id="25" name="Slide Number Placeholder 0"/>
           <p:cNvSpPr>
             <a:spLocks noGrp="1"/>
@@ -7940,6 +9284,158 @@
       </p:sp>
       <p:sp>
         <p:nvSpPr>
+          <p:cNvPr id="17" name="Shape 15"/>
+          <p:cNvSpPr/>
+          <p:nvPr/>
+        </p:nvSpPr>
+        <p:spPr>
+          <a:xfrm>
+            <a:off x="9287967" y="91440"/>
+            <a:ext cx="2355088" cy="274320"/>
+          </a:xfrm>
+          <a:prstGeom prst="rect">
+            <a:avLst/>
+          </a:prstGeom>
+          <a:solidFill>
+            <a:srgbClr val="FEF3C7"/>
+          </a:solidFill>
+          <a:ln w="12700">
+            <a:solidFill>
+              <a:srgbClr val="B45309"/>
+            </a:solidFill>
+            <a:prstDash val="solid"/>
+          </a:ln>
+        </p:spPr>
+      </p:sp>
+      <p:sp>
+        <p:nvSpPr>
+          <p:cNvPr id="18" name="Shape 16"/>
+          <p:cNvSpPr/>
+          <p:nvPr/>
+        </p:nvSpPr>
+        <p:spPr>
+          <a:xfrm>
+            <a:off x="9287967" y="91440"/>
+            <a:ext cx="27432" cy="274320"/>
+          </a:xfrm>
+          <a:prstGeom prst="rect">
+            <a:avLst/>
+          </a:prstGeom>
+          <a:solidFill>
+            <a:srgbClr val="B45309"/>
+          </a:solidFill>
+          <a:ln w="12700">
+            <a:solidFill>
+              <a:srgbClr val="B45309"/>
+            </a:solidFill>
+            <a:prstDash val="solid"/>
+          </a:ln>
+        </p:spPr>
+      </p:sp>
+      <p:sp>
+        <p:nvSpPr>
+          <p:cNvPr id="19" name="Shape 17"/>
+          <p:cNvSpPr/>
+          <p:nvPr/>
+        </p:nvSpPr>
+        <p:spPr>
+          <a:xfrm>
+            <a:off x="9342831" y="91440"/>
+            <a:ext cx="27432" cy="274320"/>
+          </a:xfrm>
+          <a:prstGeom prst="rect">
+            <a:avLst/>
+          </a:prstGeom>
+          <a:solidFill>
+            <a:srgbClr val="B45309"/>
+          </a:solidFill>
+          <a:ln w="12700">
+            <a:solidFill>
+              <a:srgbClr val="B45309"/>
+            </a:solidFill>
+            <a:prstDash val="solid"/>
+          </a:ln>
+        </p:spPr>
+      </p:sp>
+      <p:pic>
+        <p:nvPicPr>
+          <p:cNvPr id="20" name="Image 0" descr="preencoded.png">    </p:cNvPr>
+          <p:cNvPicPr>
+            <a:picLocks noChangeAspect="1"/>
+          </p:cNvPicPr>
+          <p:nvPr/>
+        </p:nvPicPr>
+        <p:blipFill>
+          <a:blip r:embed="rId1"/>
+          <a:stretch>
+            <a:fillRect/>
+          </a:stretch>
+        </p:blipFill>
+        <p:spPr>
+          <a:xfrm>
+            <a:off x="9415983" y="128016"/>
+            <a:ext cx="201168" cy="201168"/>
+          </a:xfrm>
+          <a:prstGeom prst="rect">
+            <a:avLst/>
+          </a:prstGeom>
+        </p:spPr>
+      </p:pic>
+      <p:sp>
+        <p:nvSpPr>
+          <p:cNvPr id="21" name="Text 18"/>
+          <p:cNvSpPr txBox="1"/>
+          <p:nvPr/>
+        </p:nvSpPr>
+        <p:spPr>
+          <a:xfrm>
+            <a:off x="9672015" y="91440"/>
+            <a:ext cx="1934464" cy="274320"/>
+          </a:xfrm>
+          <a:prstGeom prst="rect">
+            <a:avLst/>
+          </a:prstGeom>
+          <a:noFill/>
+          <a:ln/>
+        </p:spPr>
+        <p:txBody>
+          <a:bodyPr wrap="square" lIns="0" tIns="0" rIns="0" bIns="0" rtlCol="0" anchor="ctr"/>
+          <a:lstStyle/>
+          <a:p>
+            <a:pPr indent="0" marL="0">
+              <a:buNone/>
+            </a:pPr>
+            <a:r>
+              <a:rPr lang="en-US" sz="1100" b="1" dirty="0">
+                <a:solidFill>
+                  <a:srgbClr val="92400E"/>
+                </a:solidFill>
+                <a:latin typeface="Calibri" pitchFamily="34" charset="0"/>
+                <a:ea typeface="Calibri" pitchFamily="34" charset="-122"/>
+                <a:cs typeface="Calibri" pitchFamily="34" charset="-120"/>
+              </a:rPr>
+              <a:t>USE NOW</a:t>
+            </a:r>
+            <a:pPr indent="0" marL="0">
+              <a:buNone/>
+            </a:pPr>
+            <a:r>
+              <a:rPr lang="en-US" sz="1100" dirty="0">
+                <a:solidFill>
+                  <a:srgbClr val="92400E"/>
+                </a:solidFill>
+                <a:latin typeface="Calibri" pitchFamily="34" charset="0"/>
+                <a:ea typeface="Calibri" pitchFamily="34" charset="-122"/>
+                <a:cs typeface="Calibri" pitchFamily="34" charset="-120"/>
+              </a:rPr>
+              <a:t> · the PRG32 tools</a:t>
+            </a:r>
+            <a:endParaRPr lang="en-US" sz="1100" dirty="0"/>
+          </a:p>
+        </p:txBody>
+      </p:sp>
+      <p:sp>
+        <p:nvSpPr>
           <p:cNvPr id="25" name="Slide Number Placeholder 0"/>
           <p:cNvSpPr>
             <a:spLocks noGrp="1"/>
@@ -8771,6 +10267,158 @@
               <a:t>A black screen: check the wiring of the display against the firmware</a:t>
             </a:r>
             <a:endParaRPr lang="en-US" sz="1200" dirty="0"/>
+          </a:p>
+        </p:txBody>
+      </p:sp>
+      <p:sp>
+        <p:nvSpPr>
+          <p:cNvPr id="17" name="Shape 15"/>
+          <p:cNvSpPr/>
+          <p:nvPr/>
+        </p:nvSpPr>
+        <p:spPr>
+          <a:xfrm>
+            <a:off x="9287967" y="91440"/>
+            <a:ext cx="2355088" cy="274320"/>
+          </a:xfrm>
+          <a:prstGeom prst="rect">
+            <a:avLst/>
+          </a:prstGeom>
+          <a:solidFill>
+            <a:srgbClr val="FEF3C7"/>
+          </a:solidFill>
+          <a:ln w="12700">
+            <a:solidFill>
+              <a:srgbClr val="B45309"/>
+            </a:solidFill>
+            <a:prstDash val="solid"/>
+          </a:ln>
+        </p:spPr>
+      </p:sp>
+      <p:sp>
+        <p:nvSpPr>
+          <p:cNvPr id="18" name="Shape 16"/>
+          <p:cNvSpPr/>
+          <p:nvPr/>
+        </p:nvSpPr>
+        <p:spPr>
+          <a:xfrm>
+            <a:off x="9287967" y="91440"/>
+            <a:ext cx="27432" cy="274320"/>
+          </a:xfrm>
+          <a:prstGeom prst="rect">
+            <a:avLst/>
+          </a:prstGeom>
+          <a:solidFill>
+            <a:srgbClr val="B45309"/>
+          </a:solidFill>
+          <a:ln w="12700">
+            <a:solidFill>
+              <a:srgbClr val="B45309"/>
+            </a:solidFill>
+            <a:prstDash val="solid"/>
+          </a:ln>
+        </p:spPr>
+      </p:sp>
+      <p:sp>
+        <p:nvSpPr>
+          <p:cNvPr id="19" name="Shape 17"/>
+          <p:cNvSpPr/>
+          <p:nvPr/>
+        </p:nvSpPr>
+        <p:spPr>
+          <a:xfrm>
+            <a:off x="9342831" y="91440"/>
+            <a:ext cx="27432" cy="274320"/>
+          </a:xfrm>
+          <a:prstGeom prst="rect">
+            <a:avLst/>
+          </a:prstGeom>
+          <a:solidFill>
+            <a:srgbClr val="B45309"/>
+          </a:solidFill>
+          <a:ln w="12700">
+            <a:solidFill>
+              <a:srgbClr val="B45309"/>
+            </a:solidFill>
+            <a:prstDash val="solid"/>
+          </a:ln>
+        </p:spPr>
+      </p:sp>
+      <p:pic>
+        <p:nvPicPr>
+          <p:cNvPr id="20" name="Image 0" descr="preencoded.png">    </p:cNvPr>
+          <p:cNvPicPr>
+            <a:picLocks noChangeAspect="1"/>
+          </p:cNvPicPr>
+          <p:nvPr/>
+        </p:nvPicPr>
+        <p:blipFill>
+          <a:blip r:embed="rId1"/>
+          <a:stretch>
+            <a:fillRect/>
+          </a:stretch>
+        </p:blipFill>
+        <p:spPr>
+          <a:xfrm>
+            <a:off x="9415983" y="128016"/>
+            <a:ext cx="201168" cy="201168"/>
+          </a:xfrm>
+          <a:prstGeom prst="rect">
+            <a:avLst/>
+          </a:prstGeom>
+        </p:spPr>
+      </p:pic>
+      <p:sp>
+        <p:nvSpPr>
+          <p:cNvPr id="21" name="Text 18"/>
+          <p:cNvSpPr txBox="1"/>
+          <p:nvPr/>
+        </p:nvSpPr>
+        <p:spPr>
+          <a:xfrm>
+            <a:off x="9672015" y="91440"/>
+            <a:ext cx="1934464" cy="274320"/>
+          </a:xfrm>
+          <a:prstGeom prst="rect">
+            <a:avLst/>
+          </a:prstGeom>
+          <a:noFill/>
+          <a:ln/>
+        </p:spPr>
+        <p:txBody>
+          <a:bodyPr wrap="square" lIns="0" tIns="0" rIns="0" bIns="0" rtlCol="0" anchor="ctr"/>
+          <a:lstStyle/>
+          <a:p>
+            <a:pPr indent="0" marL="0">
+              <a:buNone/>
+            </a:pPr>
+            <a:r>
+              <a:rPr lang="en-US" sz="1100" b="1" dirty="0">
+                <a:solidFill>
+                  <a:srgbClr val="92400E"/>
+                </a:solidFill>
+                <a:latin typeface="Calibri" pitchFamily="34" charset="0"/>
+                <a:ea typeface="Calibri" pitchFamily="34" charset="-122"/>
+                <a:cs typeface="Calibri" pitchFamily="34" charset="-120"/>
+              </a:rPr>
+              <a:t>USE NOW</a:t>
+            </a:r>
+            <a:pPr indent="0" marL="0">
+              <a:buNone/>
+            </a:pPr>
+            <a:r>
+              <a:rPr lang="en-US" sz="1100" dirty="0">
+                <a:solidFill>
+                  <a:srgbClr val="92400E"/>
+                </a:solidFill>
+                <a:latin typeface="Calibri" pitchFamily="34" charset="0"/>
+                <a:ea typeface="Calibri" pitchFamily="34" charset="-122"/>
+                <a:cs typeface="Calibri" pitchFamily="34" charset="-120"/>
+              </a:rPr>
+              <a:t> · the PRG32 tools</a:t>
+            </a:r>
+            <a:endParaRPr lang="en-US" sz="1100" dirty="0"/>
           </a:p>
         </p:txBody>
       </p:sp>
@@ -10157,6 +11805,158 @@
       </p:graphicFrame>
       <p:sp>
         <p:nvSpPr>
+          <p:cNvPr id="4" name="Shape 1"/>
+          <p:cNvSpPr/>
+          <p:nvPr/>
+        </p:nvSpPr>
+        <p:spPr>
+          <a:xfrm>
+            <a:off x="9287967" y="91440"/>
+            <a:ext cx="2355088" cy="274320"/>
+          </a:xfrm>
+          <a:prstGeom prst="rect">
+            <a:avLst/>
+          </a:prstGeom>
+          <a:solidFill>
+            <a:srgbClr val="FEF3C7"/>
+          </a:solidFill>
+          <a:ln w="12700">
+            <a:solidFill>
+              <a:srgbClr val="B45309"/>
+            </a:solidFill>
+            <a:prstDash val="solid"/>
+          </a:ln>
+        </p:spPr>
+      </p:sp>
+      <p:sp>
+        <p:nvSpPr>
+          <p:cNvPr id="5" name="Shape 2"/>
+          <p:cNvSpPr/>
+          <p:nvPr/>
+        </p:nvSpPr>
+        <p:spPr>
+          <a:xfrm>
+            <a:off x="9287967" y="91440"/>
+            <a:ext cx="27432" cy="274320"/>
+          </a:xfrm>
+          <a:prstGeom prst="rect">
+            <a:avLst/>
+          </a:prstGeom>
+          <a:solidFill>
+            <a:srgbClr val="B45309"/>
+          </a:solidFill>
+          <a:ln w="12700">
+            <a:solidFill>
+              <a:srgbClr val="B45309"/>
+            </a:solidFill>
+            <a:prstDash val="solid"/>
+          </a:ln>
+        </p:spPr>
+      </p:sp>
+      <p:sp>
+        <p:nvSpPr>
+          <p:cNvPr id="6" name="Shape 3"/>
+          <p:cNvSpPr/>
+          <p:nvPr/>
+        </p:nvSpPr>
+        <p:spPr>
+          <a:xfrm>
+            <a:off x="9342831" y="91440"/>
+            <a:ext cx="27432" cy="274320"/>
+          </a:xfrm>
+          <a:prstGeom prst="rect">
+            <a:avLst/>
+          </a:prstGeom>
+          <a:solidFill>
+            <a:srgbClr val="B45309"/>
+          </a:solidFill>
+          <a:ln w="12700">
+            <a:solidFill>
+              <a:srgbClr val="B45309"/>
+            </a:solidFill>
+            <a:prstDash val="solid"/>
+          </a:ln>
+        </p:spPr>
+      </p:sp>
+      <p:pic>
+        <p:nvPicPr>
+          <p:cNvPr id="7" name="Image 0" descr="preencoded.png">    </p:cNvPr>
+          <p:cNvPicPr>
+            <a:picLocks noChangeAspect="1"/>
+          </p:cNvPicPr>
+          <p:nvPr/>
+        </p:nvPicPr>
+        <p:blipFill>
+          <a:blip r:embed="rId1"/>
+          <a:stretch>
+            <a:fillRect/>
+          </a:stretch>
+        </p:blipFill>
+        <p:spPr>
+          <a:xfrm>
+            <a:off x="9415983" y="128016"/>
+            <a:ext cx="201168" cy="201168"/>
+          </a:xfrm>
+          <a:prstGeom prst="rect">
+            <a:avLst/>
+          </a:prstGeom>
+        </p:spPr>
+      </p:pic>
+      <p:sp>
+        <p:nvSpPr>
+          <p:cNvPr id="8" name="Text 4"/>
+          <p:cNvSpPr txBox="1"/>
+          <p:nvPr/>
+        </p:nvSpPr>
+        <p:spPr>
+          <a:xfrm>
+            <a:off x="9672015" y="91440"/>
+            <a:ext cx="1934464" cy="274320"/>
+          </a:xfrm>
+          <a:prstGeom prst="rect">
+            <a:avLst/>
+          </a:prstGeom>
+          <a:noFill/>
+          <a:ln/>
+        </p:spPr>
+        <p:txBody>
+          <a:bodyPr wrap="square" lIns="0" tIns="0" rIns="0" bIns="0" rtlCol="0" anchor="ctr"/>
+          <a:lstStyle/>
+          <a:p>
+            <a:pPr indent="0" marL="0">
+              <a:buNone/>
+            </a:pPr>
+            <a:r>
+              <a:rPr lang="en-US" sz="1100" b="1" dirty="0">
+                <a:solidFill>
+                  <a:srgbClr val="92400E"/>
+                </a:solidFill>
+                <a:latin typeface="Calibri" pitchFamily="34" charset="0"/>
+                <a:ea typeface="Calibri" pitchFamily="34" charset="-122"/>
+                <a:cs typeface="Calibri" pitchFamily="34" charset="-120"/>
+              </a:rPr>
+              <a:t>USE NOW</a:t>
+            </a:r>
+            <a:pPr indent="0" marL="0">
+              <a:buNone/>
+            </a:pPr>
+            <a:r>
+              <a:rPr lang="en-US" sz="1100" dirty="0">
+                <a:solidFill>
+                  <a:srgbClr val="92400E"/>
+                </a:solidFill>
+                <a:latin typeface="Calibri" pitchFamily="34" charset="0"/>
+                <a:ea typeface="Calibri" pitchFamily="34" charset="-122"/>
+                <a:cs typeface="Calibri" pitchFamily="34" charset="-120"/>
+              </a:rPr>
+              <a:t> · the PRG32 tools</a:t>
+            </a:r>
+            <a:endParaRPr lang="en-US" sz="1100" dirty="0"/>
+          </a:p>
+        </p:txBody>
+      </p:sp>
+      <p:sp>
+        <p:nvSpPr>
           <p:cNvPr id="25" name="Slide Number Placeholder 0"/>
           <p:cNvSpPr>
             <a:spLocks noGrp="1"/>
@@ -12319,6 +14119,285 @@
       </p:sp>
       <p:sp>
         <p:nvSpPr>
+          <p:cNvPr id="17" name="Shape 15"/>
+          <p:cNvSpPr/>
+          <p:nvPr/>
+        </p:nvSpPr>
+        <p:spPr>
+          <a:xfrm>
+            <a:off x="8762695" y="91440"/>
+            <a:ext cx="2880360" cy="274320"/>
+          </a:xfrm>
+          <a:prstGeom prst="rect">
+            <a:avLst/>
+          </a:prstGeom>
+          <a:solidFill>
+            <a:srgbClr val="FEF3C7"/>
+          </a:solidFill>
+          <a:ln w="12700">
+            <a:solidFill>
+              <a:srgbClr val="B45309"/>
+            </a:solidFill>
+            <a:prstDash val="solid"/>
+          </a:ln>
+        </p:spPr>
+      </p:sp>
+      <p:sp>
+        <p:nvSpPr>
+          <p:cNvPr id="18" name="Shape 16"/>
+          <p:cNvSpPr/>
+          <p:nvPr/>
+        </p:nvSpPr>
+        <p:spPr>
+          <a:xfrm>
+            <a:off x="8762695" y="91440"/>
+            <a:ext cx="27432" cy="274320"/>
+          </a:xfrm>
+          <a:prstGeom prst="rect">
+            <a:avLst/>
+          </a:prstGeom>
+          <a:solidFill>
+            <a:srgbClr val="B45309"/>
+          </a:solidFill>
+          <a:ln w="12700">
+            <a:solidFill>
+              <a:srgbClr val="B45309"/>
+            </a:solidFill>
+            <a:prstDash val="solid"/>
+          </a:ln>
+        </p:spPr>
+      </p:sp>
+      <p:sp>
+        <p:nvSpPr>
+          <p:cNvPr id="19" name="Shape 17"/>
+          <p:cNvSpPr/>
+          <p:nvPr/>
+        </p:nvSpPr>
+        <p:spPr>
+          <a:xfrm>
+            <a:off x="8817559" y="91440"/>
+            <a:ext cx="27432" cy="274320"/>
+          </a:xfrm>
+          <a:prstGeom prst="rect">
+            <a:avLst/>
+          </a:prstGeom>
+          <a:solidFill>
+            <a:srgbClr val="B45309"/>
+          </a:solidFill>
+          <a:ln w="12700">
+            <a:solidFill>
+              <a:srgbClr val="B45309"/>
+            </a:solidFill>
+            <a:prstDash val="solid"/>
+          </a:ln>
+        </p:spPr>
+      </p:sp>
+      <p:pic>
+        <p:nvPicPr>
+          <p:cNvPr id="20" name="Image 0" descr="preencoded.png">    </p:cNvPr>
+          <p:cNvPicPr>
+            <a:picLocks noChangeAspect="1"/>
+          </p:cNvPicPr>
+          <p:nvPr/>
+        </p:nvPicPr>
+        <p:blipFill>
+          <a:blip r:embed="rId1"/>
+          <a:stretch>
+            <a:fillRect/>
+          </a:stretch>
+        </p:blipFill>
+        <p:spPr>
+          <a:xfrm>
+            <a:off x="8890711" y="128016"/>
+            <a:ext cx="201168" cy="201168"/>
+          </a:xfrm>
+          <a:prstGeom prst="rect">
+            <a:avLst/>
+          </a:prstGeom>
+        </p:spPr>
+      </p:pic>
+      <p:sp>
+        <p:nvSpPr>
+          <p:cNvPr id="21" name="Text 18"/>
+          <p:cNvSpPr txBox="1"/>
+          <p:nvPr/>
+        </p:nvSpPr>
+        <p:spPr>
+          <a:xfrm>
+            <a:off x="9146743" y="91440"/>
+            <a:ext cx="2459736" cy="274320"/>
+          </a:xfrm>
+          <a:prstGeom prst="rect">
+            <a:avLst/>
+          </a:prstGeom>
+          <a:noFill/>
+          <a:ln/>
+        </p:spPr>
+        <p:txBody>
+          <a:bodyPr wrap="square" lIns="0" tIns="0" rIns="0" bIns="0" rtlCol="0" anchor="ctr"/>
+          <a:lstStyle/>
+          <a:p>
+            <a:pPr indent="0" marL="0">
+              <a:buNone/>
+            </a:pPr>
+            <a:r>
+              <a:rPr lang="en-US" sz="1100" b="1" dirty="0">
+                <a:solidFill>
+                  <a:srgbClr val="92400E"/>
+                </a:solidFill>
+                <a:latin typeface="Calibri" pitchFamily="34" charset="0"/>
+                <a:ea typeface="Calibri" pitchFamily="34" charset="-122"/>
+                <a:cs typeface="Calibri" pitchFamily="34" charset="-120"/>
+              </a:rPr>
+              <a:t>USE NOW</a:t>
+            </a:r>
+            <a:pPr indent="0" marL="0">
+              <a:buNone/>
+            </a:pPr>
+            <a:r>
+              <a:rPr lang="en-US" sz="1100" dirty="0">
+                <a:solidFill>
+                  <a:srgbClr val="92400E"/>
+                </a:solidFill>
+                <a:latin typeface="Calibri" pitchFamily="34" charset="0"/>
+                <a:ea typeface="Calibri" pitchFamily="34" charset="-122"/>
+                <a:cs typeface="Calibri" pitchFamily="34" charset="-120"/>
+              </a:rPr>
+              <a:t> · the PRG32 runtime calls</a:t>
+            </a:r>
+            <a:endParaRPr lang="en-US" sz="1100" dirty="0"/>
+          </a:p>
+        </p:txBody>
+      </p:sp>
+      <p:sp>
+        <p:nvSpPr>
+          <p:cNvPr id="22" name="Shape 19"/>
+          <p:cNvSpPr/>
+          <p:nvPr/>
+        </p:nvSpPr>
+        <p:spPr>
+          <a:xfrm>
+            <a:off x="5625922" y="91440"/>
+            <a:ext cx="3027045" cy="274320"/>
+          </a:xfrm>
+          <a:prstGeom prst="rect">
+            <a:avLst/>
+          </a:prstGeom>
+          <a:solidFill>
+            <a:srgbClr val="E0F2FE"/>
+          </a:solidFill>
+          <a:ln w="12700">
+            <a:solidFill>
+              <a:srgbClr val="0369A1"/>
+            </a:solidFill>
+            <a:prstDash val="solid"/>
+          </a:ln>
+        </p:spPr>
+      </p:sp>
+      <p:sp>
+        <p:nvSpPr>
+          <p:cNvPr id="23" name="Shape 20"/>
+          <p:cNvSpPr/>
+          <p:nvPr/>
+        </p:nvSpPr>
+        <p:spPr>
+          <a:xfrm>
+            <a:off x="5625922" y="91440"/>
+            <a:ext cx="73152" cy="274320"/>
+          </a:xfrm>
+          <a:prstGeom prst="rect">
+            <a:avLst/>
+          </a:prstGeom>
+          <a:solidFill>
+            <a:srgbClr val="0369A1"/>
+          </a:solidFill>
+          <a:ln w="12700">
+            <a:solidFill>
+              <a:srgbClr val="0369A1"/>
+            </a:solidFill>
+            <a:prstDash val="solid"/>
+          </a:ln>
+        </p:spPr>
+      </p:sp>
+      <p:pic>
+        <p:nvPicPr>
+          <p:cNvPr id="24" name="Image 1" descr="preencoded.png">    </p:cNvPr>
+          <p:cNvPicPr>
+            <a:picLocks noChangeAspect="1"/>
+          </p:cNvPicPr>
+          <p:nvPr/>
+        </p:nvPicPr>
+        <p:blipFill>
+          <a:blip r:embed="rId2"/>
+          <a:stretch>
+            <a:fillRect/>
+          </a:stretch>
+        </p:blipFill>
+        <p:spPr>
+          <a:xfrm>
+            <a:off x="5753938" y="128016"/>
+            <a:ext cx="201168" cy="201168"/>
+          </a:xfrm>
+          <a:prstGeom prst="rect">
+            <a:avLst/>
+          </a:prstGeom>
+        </p:spPr>
+      </p:pic>
+      <p:sp>
+        <p:nvSpPr>
+          <p:cNvPr id="25" name="Text 21"/>
+          <p:cNvSpPr txBox="1"/>
+          <p:nvPr/>
+        </p:nvSpPr>
+        <p:spPr>
+          <a:xfrm>
+            <a:off x="6009970" y="91440"/>
+            <a:ext cx="2606421" cy="274320"/>
+          </a:xfrm>
+          <a:prstGeom prst="rect">
+            <a:avLst/>
+          </a:prstGeom>
+          <a:noFill/>
+          <a:ln/>
+        </p:spPr>
+        <p:txBody>
+          <a:bodyPr wrap="square" lIns="0" tIns="0" rIns="0" bIns="0" rtlCol="0" anchor="ctr"/>
+          <a:lstStyle/>
+          <a:p>
+            <a:pPr indent="0" marL="0">
+              <a:buNone/>
+            </a:pPr>
+            <a:r>
+              <a:rPr lang="en-US" sz="1100" b="1" dirty="0">
+                <a:solidFill>
+                  <a:srgbClr val="075985"/>
+                </a:solidFill>
+                <a:latin typeface="Calibri" pitchFamily="34" charset="0"/>
+                <a:ea typeface="Calibri" pitchFamily="34" charset="-122"/>
+                <a:cs typeface="Calibri" pitchFamily="34" charset="-120"/>
+              </a:rPr>
+              <a:t>UNDERSTAND NOW</a:t>
+            </a:r>
+            <a:pPr indent="0" marL="0">
+              <a:buNone/>
+            </a:pPr>
+            <a:r>
+              <a:rPr lang="en-US" sz="1100" dirty="0">
+                <a:solidFill>
+                  <a:srgbClr val="075985"/>
+                </a:solidFill>
+                <a:latin typeface="Calibri" pitchFamily="34" charset="0"/>
+                <a:ea typeface="Calibri" pitchFamily="34" charset="-122"/>
+                <a:cs typeface="Calibri" pitchFamily="34" charset="-120"/>
+              </a:rPr>
+              <a:t> · two's complement</a:t>
+            </a:r>
+            <a:endParaRPr lang="en-US" sz="1100" dirty="0"/>
+          </a:p>
+        </p:txBody>
+      </p:sp>
+      <p:sp>
+        <p:nvSpPr>
           <p:cNvPr id="25" name="Slide Number Placeholder 0"/>
           <p:cNvSpPr>
             <a:spLocks noGrp="1"/>
@@ -12980,6 +15059,133 @@
       </p:sp>
       <p:sp>
         <p:nvSpPr>
+          <p:cNvPr id="13" name="Shape 11"/>
+          <p:cNvSpPr/>
+          <p:nvPr/>
+        </p:nvSpPr>
+        <p:spPr>
+          <a:xfrm>
+            <a:off x="8025079" y="91440"/>
+            <a:ext cx="3617976" cy="274320"/>
+          </a:xfrm>
+          <a:prstGeom prst="rect">
+            <a:avLst/>
+          </a:prstGeom>
+          <a:solidFill>
+            <a:srgbClr val="E0F2FE"/>
+          </a:solidFill>
+          <a:ln w="12700">
+            <a:solidFill>
+              <a:srgbClr val="0369A1"/>
+            </a:solidFill>
+            <a:prstDash val="solid"/>
+          </a:ln>
+        </p:spPr>
+      </p:sp>
+      <p:sp>
+        <p:nvSpPr>
+          <p:cNvPr id="14" name="Shape 12"/>
+          <p:cNvSpPr/>
+          <p:nvPr/>
+        </p:nvSpPr>
+        <p:spPr>
+          <a:xfrm>
+            <a:off x="8025079" y="91440"/>
+            <a:ext cx="73152" cy="274320"/>
+          </a:xfrm>
+          <a:prstGeom prst="rect">
+            <a:avLst/>
+          </a:prstGeom>
+          <a:solidFill>
+            <a:srgbClr val="0369A1"/>
+          </a:solidFill>
+          <a:ln w="12700">
+            <a:solidFill>
+              <a:srgbClr val="0369A1"/>
+            </a:solidFill>
+            <a:prstDash val="solid"/>
+          </a:ln>
+        </p:spPr>
+      </p:sp>
+      <p:pic>
+        <p:nvPicPr>
+          <p:cNvPr id="15" name="Image 0" descr="preencoded.png">    </p:cNvPr>
+          <p:cNvPicPr>
+            <a:picLocks noChangeAspect="1"/>
+          </p:cNvPicPr>
+          <p:nvPr/>
+        </p:nvPicPr>
+        <p:blipFill>
+          <a:blip r:embed="rId1"/>
+          <a:stretch>
+            <a:fillRect/>
+          </a:stretch>
+        </p:blipFill>
+        <p:spPr>
+          <a:xfrm>
+            <a:off x="8153095" y="128016"/>
+            <a:ext cx="201168" cy="201168"/>
+          </a:xfrm>
+          <a:prstGeom prst="rect">
+            <a:avLst/>
+          </a:prstGeom>
+        </p:spPr>
+      </p:pic>
+      <p:sp>
+        <p:nvSpPr>
+          <p:cNvPr id="16" name="Text 13"/>
+          <p:cNvSpPr txBox="1"/>
+          <p:nvPr/>
+        </p:nvSpPr>
+        <p:spPr>
+          <a:xfrm>
+            <a:off x="8409127" y="91440"/>
+            <a:ext cx="3197352" cy="274320"/>
+          </a:xfrm>
+          <a:prstGeom prst="rect">
+            <a:avLst/>
+          </a:prstGeom>
+          <a:noFill/>
+          <a:ln/>
+        </p:spPr>
+        <p:txBody>
+          <a:bodyPr wrap="square" lIns="0" tIns="0" rIns="0" bIns="0" rtlCol="0" anchor="ctr"/>
+          <a:lstStyle/>
+          <a:p>
+            <a:pPr indent="0" marL="0">
+              <a:buNone/>
+            </a:pPr>
+            <a:r>
+              <a:rPr lang="en-US" sz="1100" b="1" dirty="0">
+                <a:solidFill>
+                  <a:srgbClr val="075985"/>
+                </a:solidFill>
+                <a:latin typeface="Calibri" pitchFamily="34" charset="0"/>
+                <a:ea typeface="Calibri" pitchFamily="34" charset="-122"/>
+                <a:cs typeface="Calibri" pitchFamily="34" charset="-120"/>
+              </a:rPr>
+              <a:t>UNDERSTAND NOW</a:t>
+            </a:r>
+            <a:pPr indent="0" marL="0">
+              <a:buNone/>
+            </a:pPr>
+            <a:r>
+              <a:rPr lang="en-US" sz="1100" dirty="0">
+                <a:solidFill>
+                  <a:srgbClr val="075985"/>
+                </a:solidFill>
+                <a:latin typeface="Calibri" pitchFamily="34" charset="0"/>
+                <a:ea typeface="Calibri" pitchFamily="34" charset="-122"/>
+                <a:cs typeface="Calibri" pitchFamily="34" charset="-120"/>
+              </a:rPr>
+              <a:t> · shifts as multiplications</a:t>
+            </a:r>
+            <a:endParaRPr lang="en-US" sz="1100" dirty="0"/>
+          </a:p>
+        </p:txBody>
+      </p:sp>
+      <p:sp>
+        <p:nvSpPr>
           <p:cNvPr id="25" name="Slide Number Placeholder 0"/>
           <p:cNvSpPr>
             <a:spLocks noGrp="1"/>
@@ -13581,6 +15787,133 @@
       </p:sp>
       <p:sp>
         <p:nvSpPr>
+          <p:cNvPr id="13" name="Shape 11"/>
+          <p:cNvSpPr/>
+          <p:nvPr/>
+        </p:nvSpPr>
+        <p:spPr>
+          <a:xfrm>
+            <a:off x="8616010" y="91440"/>
+            <a:ext cx="3027045" cy="274320"/>
+          </a:xfrm>
+          <a:prstGeom prst="rect">
+            <a:avLst/>
+          </a:prstGeom>
+          <a:solidFill>
+            <a:srgbClr val="E0F2FE"/>
+          </a:solidFill>
+          <a:ln w="12700">
+            <a:solidFill>
+              <a:srgbClr val="0369A1"/>
+            </a:solidFill>
+            <a:prstDash val="solid"/>
+          </a:ln>
+        </p:spPr>
+      </p:sp>
+      <p:sp>
+        <p:nvSpPr>
+          <p:cNvPr id="14" name="Shape 12"/>
+          <p:cNvSpPr/>
+          <p:nvPr/>
+        </p:nvSpPr>
+        <p:spPr>
+          <a:xfrm>
+            <a:off x="8616010" y="91440"/>
+            <a:ext cx="73152" cy="274320"/>
+          </a:xfrm>
+          <a:prstGeom prst="rect">
+            <a:avLst/>
+          </a:prstGeom>
+          <a:solidFill>
+            <a:srgbClr val="0369A1"/>
+          </a:solidFill>
+          <a:ln w="12700">
+            <a:solidFill>
+              <a:srgbClr val="0369A1"/>
+            </a:solidFill>
+            <a:prstDash val="solid"/>
+          </a:ln>
+        </p:spPr>
+      </p:sp>
+      <p:pic>
+        <p:nvPicPr>
+          <p:cNvPr id="15" name="Image 0" descr="preencoded.png">    </p:cNvPr>
+          <p:cNvPicPr>
+            <a:picLocks noChangeAspect="1"/>
+          </p:cNvPicPr>
+          <p:nvPr/>
+        </p:nvPicPr>
+        <p:blipFill>
+          <a:blip r:embed="rId1"/>
+          <a:stretch>
+            <a:fillRect/>
+          </a:stretch>
+        </p:blipFill>
+        <p:spPr>
+          <a:xfrm>
+            <a:off x="8744026" y="128016"/>
+            <a:ext cx="201168" cy="201168"/>
+          </a:xfrm>
+          <a:prstGeom prst="rect">
+            <a:avLst/>
+          </a:prstGeom>
+        </p:spPr>
+      </p:pic>
+      <p:sp>
+        <p:nvSpPr>
+          <p:cNvPr id="16" name="Text 13"/>
+          <p:cNvSpPr txBox="1"/>
+          <p:nvPr/>
+        </p:nvSpPr>
+        <p:spPr>
+          <a:xfrm>
+            <a:off x="9000058" y="91440"/>
+            <a:ext cx="2606421" cy="274320"/>
+          </a:xfrm>
+          <a:prstGeom prst="rect">
+            <a:avLst/>
+          </a:prstGeom>
+          <a:noFill/>
+          <a:ln/>
+        </p:spPr>
+        <p:txBody>
+          <a:bodyPr wrap="square" lIns="0" tIns="0" rIns="0" bIns="0" rtlCol="0" anchor="ctr"/>
+          <a:lstStyle/>
+          <a:p>
+            <a:pPr indent="0" marL="0">
+              <a:buNone/>
+            </a:pPr>
+            <a:r>
+              <a:rPr lang="en-US" sz="1100" b="1" dirty="0">
+                <a:solidFill>
+                  <a:srgbClr val="075985"/>
+                </a:solidFill>
+                <a:latin typeface="Calibri" pitchFamily="34" charset="0"/>
+                <a:ea typeface="Calibri" pitchFamily="34" charset="-122"/>
+                <a:cs typeface="Calibri" pitchFamily="34" charset="-120"/>
+              </a:rPr>
+              <a:t>UNDERSTAND NOW</a:t>
+            </a:r>
+            <a:pPr indent="0" marL="0">
+              <a:buNone/>
+            </a:pPr>
+            <a:r>
+              <a:rPr lang="en-US" sz="1100" dirty="0">
+                <a:solidFill>
+                  <a:srgbClr val="075985"/>
+                </a:solidFill>
+                <a:latin typeface="Calibri" pitchFamily="34" charset="0"/>
+                <a:ea typeface="Calibri" pitchFamily="34" charset="-122"/>
+                <a:cs typeface="Calibri" pitchFamily="34" charset="-120"/>
+              </a:rPr>
+              <a:t> · two's complement</a:t>
+            </a:r>
+            <a:endParaRPr lang="en-US" sz="1100" dirty="0"/>
+          </a:p>
+        </p:txBody>
+      </p:sp>
+      <p:sp>
+        <p:nvSpPr>
           <p:cNvPr id="25" name="Slide Number Placeholder 0"/>
           <p:cNvSpPr>
             <a:spLocks noGrp="1"/>
@@ -14108,6 +16441,133 @@
               <a:t>Lab 06, step 2: seven lamps for the button bits and a marker</a:t>
             </a:r>
             <a:endParaRPr lang="en-US" sz="1200" dirty="0"/>
+          </a:p>
+        </p:txBody>
+      </p:sp>
+      <p:sp>
+        <p:nvSpPr>
+          <p:cNvPr id="15" name="Shape 12"/>
+          <p:cNvSpPr/>
+          <p:nvPr/>
+        </p:nvSpPr>
+        <p:spPr>
+          <a:xfrm>
+            <a:off x="7631125" y="91440"/>
+            <a:ext cx="4011930" cy="274320"/>
+          </a:xfrm>
+          <a:prstGeom prst="rect">
+            <a:avLst/>
+          </a:prstGeom>
+          <a:solidFill>
+            <a:srgbClr val="E0F2FE"/>
+          </a:solidFill>
+          <a:ln w="12700">
+            <a:solidFill>
+              <a:srgbClr val="0369A1"/>
+            </a:solidFill>
+            <a:prstDash val="solid"/>
+          </a:ln>
+        </p:spPr>
+      </p:sp>
+      <p:sp>
+        <p:nvSpPr>
+          <p:cNvPr id="16" name="Shape 13"/>
+          <p:cNvSpPr/>
+          <p:nvPr/>
+        </p:nvSpPr>
+        <p:spPr>
+          <a:xfrm>
+            <a:off x="7631125" y="91440"/>
+            <a:ext cx="73152" cy="274320"/>
+          </a:xfrm>
+          <a:prstGeom prst="rect">
+            <a:avLst/>
+          </a:prstGeom>
+          <a:solidFill>
+            <a:srgbClr val="0369A1"/>
+          </a:solidFill>
+          <a:ln w="12700">
+            <a:solidFill>
+              <a:srgbClr val="0369A1"/>
+            </a:solidFill>
+            <a:prstDash val="solid"/>
+          </a:ln>
+        </p:spPr>
+      </p:sp>
+      <p:pic>
+        <p:nvPicPr>
+          <p:cNvPr id="17" name="Image 1" descr="preencoded.png">    </p:cNvPr>
+          <p:cNvPicPr>
+            <a:picLocks noChangeAspect="1"/>
+          </p:cNvPicPr>
+          <p:nvPr/>
+        </p:nvPicPr>
+        <p:blipFill>
+          <a:blip r:embed="rId2"/>
+          <a:stretch>
+            <a:fillRect/>
+          </a:stretch>
+        </p:blipFill>
+        <p:spPr>
+          <a:xfrm>
+            <a:off x="7759141" y="128016"/>
+            <a:ext cx="201168" cy="201168"/>
+          </a:xfrm>
+          <a:prstGeom prst="rect">
+            <a:avLst/>
+          </a:prstGeom>
+        </p:spPr>
+      </p:pic>
+      <p:sp>
+        <p:nvSpPr>
+          <p:cNvPr id="18" name="Text 14"/>
+          <p:cNvSpPr txBox="1"/>
+          <p:nvPr/>
+        </p:nvSpPr>
+        <p:spPr>
+          <a:xfrm>
+            <a:off x="8015173" y="91440"/>
+            <a:ext cx="3591306" cy="274320"/>
+          </a:xfrm>
+          <a:prstGeom prst="rect">
+            <a:avLst/>
+          </a:prstGeom>
+          <a:noFill/>
+          <a:ln/>
+        </p:spPr>
+        <p:txBody>
+          <a:bodyPr wrap="square" lIns="0" tIns="0" rIns="0" bIns="0" rtlCol="0" anchor="ctr"/>
+          <a:lstStyle/>
+          <a:p>
+            <a:pPr indent="0" marL="0">
+              <a:buNone/>
+            </a:pPr>
+            <a:r>
+              <a:rPr lang="en-US" sz="1100" b="1" dirty="0">
+                <a:solidFill>
+                  <a:srgbClr val="075985"/>
+                </a:solidFill>
+                <a:latin typeface="Calibri" pitchFamily="34" charset="0"/>
+                <a:ea typeface="Calibri" pitchFamily="34" charset="-122"/>
+                <a:cs typeface="Calibri" pitchFamily="34" charset="-120"/>
+              </a:rPr>
+              <a:t>UNDERSTAND NOW</a:t>
+            </a:r>
+            <a:pPr indent="0" marL="0">
+              <a:buNone/>
+            </a:pPr>
+            <a:r>
+              <a:rPr lang="en-US" sz="1100" dirty="0">
+                <a:solidFill>
+                  <a:srgbClr val="075985"/>
+                </a:solidFill>
+                <a:latin typeface="Calibri" pitchFamily="34" charset="0"/>
+                <a:ea typeface="Calibri" pitchFamily="34" charset="-122"/>
+                <a:cs typeface="Calibri" pitchFamily="34" charset="-120"/>
+              </a:rPr>
+              <a:t> · signed or unsigned instructions</a:t>
+            </a:r>
+            <a:endParaRPr lang="en-US" sz="1100" dirty="0"/>
           </a:p>
         </p:txBody>
       </p:sp>
@@ -16451,6 +18911,133 @@
       </p:graphicFrame>
       <p:sp>
         <p:nvSpPr>
+          <p:cNvPr id="4" name="Shape 1"/>
+          <p:cNvSpPr/>
+          <p:nvPr/>
+        </p:nvSpPr>
+        <p:spPr>
+          <a:xfrm>
+            <a:off x="7631125" y="91440"/>
+            <a:ext cx="4011930" cy="274320"/>
+          </a:xfrm>
+          <a:prstGeom prst="rect">
+            <a:avLst/>
+          </a:prstGeom>
+          <a:solidFill>
+            <a:srgbClr val="E0F2FE"/>
+          </a:solidFill>
+          <a:ln w="12700">
+            <a:solidFill>
+              <a:srgbClr val="0369A1"/>
+            </a:solidFill>
+            <a:prstDash val="solid"/>
+          </a:ln>
+        </p:spPr>
+      </p:sp>
+      <p:sp>
+        <p:nvSpPr>
+          <p:cNvPr id="5" name="Shape 2"/>
+          <p:cNvSpPr/>
+          <p:nvPr/>
+        </p:nvSpPr>
+        <p:spPr>
+          <a:xfrm>
+            <a:off x="7631125" y="91440"/>
+            <a:ext cx="73152" cy="274320"/>
+          </a:xfrm>
+          <a:prstGeom prst="rect">
+            <a:avLst/>
+          </a:prstGeom>
+          <a:solidFill>
+            <a:srgbClr val="0369A1"/>
+          </a:solidFill>
+          <a:ln w="12700">
+            <a:solidFill>
+              <a:srgbClr val="0369A1"/>
+            </a:solidFill>
+            <a:prstDash val="solid"/>
+          </a:ln>
+        </p:spPr>
+      </p:sp>
+      <p:pic>
+        <p:nvPicPr>
+          <p:cNvPr id="6" name="Image 0" descr="preencoded.png">    </p:cNvPr>
+          <p:cNvPicPr>
+            <a:picLocks noChangeAspect="1"/>
+          </p:cNvPicPr>
+          <p:nvPr/>
+        </p:nvPicPr>
+        <p:blipFill>
+          <a:blip r:embed="rId1"/>
+          <a:stretch>
+            <a:fillRect/>
+          </a:stretch>
+        </p:blipFill>
+        <p:spPr>
+          <a:xfrm>
+            <a:off x="7759141" y="128016"/>
+            <a:ext cx="201168" cy="201168"/>
+          </a:xfrm>
+          <a:prstGeom prst="rect">
+            <a:avLst/>
+          </a:prstGeom>
+        </p:spPr>
+      </p:pic>
+      <p:sp>
+        <p:nvSpPr>
+          <p:cNvPr id="7" name="Text 3"/>
+          <p:cNvSpPr txBox="1"/>
+          <p:nvPr/>
+        </p:nvSpPr>
+        <p:spPr>
+          <a:xfrm>
+            <a:off x="8015173" y="91440"/>
+            <a:ext cx="3591306" cy="274320"/>
+          </a:xfrm>
+          <a:prstGeom prst="rect">
+            <a:avLst/>
+          </a:prstGeom>
+          <a:noFill/>
+          <a:ln/>
+        </p:spPr>
+        <p:txBody>
+          <a:bodyPr wrap="square" lIns="0" tIns="0" rIns="0" bIns="0" rtlCol="0" anchor="ctr"/>
+          <a:lstStyle/>
+          <a:p>
+            <a:pPr indent="0" marL="0">
+              <a:buNone/>
+            </a:pPr>
+            <a:r>
+              <a:rPr lang="en-US" sz="1100" b="1" dirty="0">
+                <a:solidFill>
+                  <a:srgbClr val="075985"/>
+                </a:solidFill>
+                <a:latin typeface="Calibri" pitchFamily="34" charset="0"/>
+                <a:ea typeface="Calibri" pitchFamily="34" charset="-122"/>
+                <a:cs typeface="Calibri" pitchFamily="34" charset="-120"/>
+              </a:rPr>
+              <a:t>UNDERSTAND NOW</a:t>
+            </a:r>
+            <a:pPr indent="0" marL="0">
+              <a:buNone/>
+            </a:pPr>
+            <a:r>
+              <a:rPr lang="en-US" sz="1100" dirty="0">
+                <a:solidFill>
+                  <a:srgbClr val="075985"/>
+                </a:solidFill>
+                <a:latin typeface="Calibri" pitchFamily="34" charset="0"/>
+                <a:ea typeface="Calibri" pitchFamily="34" charset="-122"/>
+                <a:cs typeface="Calibri" pitchFamily="34" charset="-120"/>
+              </a:rPr>
+              <a:t> · signed or unsigned instructions</a:t>
+            </a:r>
+            <a:endParaRPr lang="en-US" sz="1100" dirty="0"/>
+          </a:p>
+        </p:txBody>
+      </p:sp>
+      <p:sp>
+        <p:nvSpPr>
           <p:cNvPr id="25" name="Slide Number Placeholder 0"/>
           <p:cNvSpPr>
             <a:spLocks noGrp="1"/>
@@ -17360,6 +19947,133 @@
       </p:sp>
       <p:sp>
         <p:nvSpPr>
+          <p:cNvPr id="17" name="Shape 15"/>
+          <p:cNvSpPr/>
+          <p:nvPr/>
+        </p:nvSpPr>
+        <p:spPr>
+          <a:xfrm>
+            <a:off x="7631125" y="91440"/>
+            <a:ext cx="4011930" cy="274320"/>
+          </a:xfrm>
+          <a:prstGeom prst="rect">
+            <a:avLst/>
+          </a:prstGeom>
+          <a:solidFill>
+            <a:srgbClr val="E0F2FE"/>
+          </a:solidFill>
+          <a:ln w="12700">
+            <a:solidFill>
+              <a:srgbClr val="0369A1"/>
+            </a:solidFill>
+            <a:prstDash val="solid"/>
+          </a:ln>
+        </p:spPr>
+      </p:sp>
+      <p:sp>
+        <p:nvSpPr>
+          <p:cNvPr id="18" name="Shape 16"/>
+          <p:cNvSpPr/>
+          <p:nvPr/>
+        </p:nvSpPr>
+        <p:spPr>
+          <a:xfrm>
+            <a:off x="7631125" y="91440"/>
+            <a:ext cx="73152" cy="274320"/>
+          </a:xfrm>
+          <a:prstGeom prst="rect">
+            <a:avLst/>
+          </a:prstGeom>
+          <a:solidFill>
+            <a:srgbClr val="0369A1"/>
+          </a:solidFill>
+          <a:ln w="12700">
+            <a:solidFill>
+              <a:srgbClr val="0369A1"/>
+            </a:solidFill>
+            <a:prstDash val="solid"/>
+          </a:ln>
+        </p:spPr>
+      </p:sp>
+      <p:pic>
+        <p:nvPicPr>
+          <p:cNvPr id="19" name="Image 0" descr="preencoded.png">    </p:cNvPr>
+          <p:cNvPicPr>
+            <a:picLocks noChangeAspect="1"/>
+          </p:cNvPicPr>
+          <p:nvPr/>
+        </p:nvPicPr>
+        <p:blipFill>
+          <a:blip r:embed="rId1"/>
+          <a:stretch>
+            <a:fillRect/>
+          </a:stretch>
+        </p:blipFill>
+        <p:spPr>
+          <a:xfrm>
+            <a:off x="7759141" y="128016"/>
+            <a:ext cx="201168" cy="201168"/>
+          </a:xfrm>
+          <a:prstGeom prst="rect">
+            <a:avLst/>
+          </a:prstGeom>
+        </p:spPr>
+      </p:pic>
+      <p:sp>
+        <p:nvSpPr>
+          <p:cNvPr id="20" name="Text 17"/>
+          <p:cNvSpPr txBox="1"/>
+          <p:nvPr/>
+        </p:nvSpPr>
+        <p:spPr>
+          <a:xfrm>
+            <a:off x="8015173" y="91440"/>
+            <a:ext cx="3591306" cy="274320"/>
+          </a:xfrm>
+          <a:prstGeom prst="rect">
+            <a:avLst/>
+          </a:prstGeom>
+          <a:noFill/>
+          <a:ln/>
+        </p:spPr>
+        <p:txBody>
+          <a:bodyPr wrap="square" lIns="0" tIns="0" rIns="0" bIns="0" rtlCol="0" anchor="ctr"/>
+          <a:lstStyle/>
+          <a:p>
+            <a:pPr indent="0" marL="0">
+              <a:buNone/>
+            </a:pPr>
+            <a:r>
+              <a:rPr lang="en-US" sz="1100" b="1" dirty="0">
+                <a:solidFill>
+                  <a:srgbClr val="075985"/>
+                </a:solidFill>
+                <a:latin typeface="Calibri" pitchFamily="34" charset="0"/>
+                <a:ea typeface="Calibri" pitchFamily="34" charset="-122"/>
+                <a:cs typeface="Calibri" pitchFamily="34" charset="-120"/>
+              </a:rPr>
+              <a:t>UNDERSTAND NOW</a:t>
+            </a:r>
+            <a:pPr indent="0" marL="0">
+              <a:buNone/>
+            </a:pPr>
+            <a:r>
+              <a:rPr lang="en-US" sz="1100" dirty="0">
+                <a:solidFill>
+                  <a:srgbClr val="075985"/>
+                </a:solidFill>
+                <a:latin typeface="Calibri" pitchFamily="34" charset="0"/>
+                <a:ea typeface="Calibri" pitchFamily="34" charset="-122"/>
+                <a:cs typeface="Calibri" pitchFamily="34" charset="-120"/>
+              </a:rPr>
+              <a:t> · signed or unsigned instructions</a:t>
+            </a:r>
+            <a:endParaRPr lang="en-US" sz="1100" dirty="0"/>
+          </a:p>
+        </p:txBody>
+      </p:sp>
+      <p:sp>
+        <p:nvSpPr>
           <p:cNvPr id="25" name="Slide Number Placeholder 0"/>
           <p:cNvSpPr>
             <a:spLocks noGrp="1"/>
@@ -18111,6 +20825,133 @@
               <a:t>Signed: adding a negative number must make the sum smaller; adding a non-negative one must not</a:t>
             </a:r>
             <a:endParaRPr lang="en-US" sz="1600" dirty="0"/>
+          </a:p>
+        </p:txBody>
+      </p:sp>
+      <p:sp>
+        <p:nvSpPr>
+          <p:cNvPr id="14" name="Shape 12"/>
+          <p:cNvSpPr/>
+          <p:nvPr/>
+        </p:nvSpPr>
+        <p:spPr>
+          <a:xfrm>
+            <a:off x="7631125" y="91440"/>
+            <a:ext cx="4011930" cy="274320"/>
+          </a:xfrm>
+          <a:prstGeom prst="rect">
+            <a:avLst/>
+          </a:prstGeom>
+          <a:solidFill>
+            <a:srgbClr val="E0F2FE"/>
+          </a:solidFill>
+          <a:ln w="12700">
+            <a:solidFill>
+              <a:srgbClr val="0369A1"/>
+            </a:solidFill>
+            <a:prstDash val="solid"/>
+          </a:ln>
+        </p:spPr>
+      </p:sp>
+      <p:sp>
+        <p:nvSpPr>
+          <p:cNvPr id="15" name="Shape 13"/>
+          <p:cNvSpPr/>
+          <p:nvPr/>
+        </p:nvSpPr>
+        <p:spPr>
+          <a:xfrm>
+            <a:off x="7631125" y="91440"/>
+            <a:ext cx="73152" cy="274320"/>
+          </a:xfrm>
+          <a:prstGeom prst="rect">
+            <a:avLst/>
+          </a:prstGeom>
+          <a:solidFill>
+            <a:srgbClr val="0369A1"/>
+          </a:solidFill>
+          <a:ln w="12700">
+            <a:solidFill>
+              <a:srgbClr val="0369A1"/>
+            </a:solidFill>
+            <a:prstDash val="solid"/>
+          </a:ln>
+        </p:spPr>
+      </p:sp>
+      <p:pic>
+        <p:nvPicPr>
+          <p:cNvPr id="16" name="Image 0" descr="preencoded.png">    </p:cNvPr>
+          <p:cNvPicPr>
+            <a:picLocks noChangeAspect="1"/>
+          </p:cNvPicPr>
+          <p:nvPr/>
+        </p:nvPicPr>
+        <p:blipFill>
+          <a:blip r:embed="rId1"/>
+          <a:stretch>
+            <a:fillRect/>
+          </a:stretch>
+        </p:blipFill>
+        <p:spPr>
+          <a:xfrm>
+            <a:off x="7759141" y="128016"/>
+            <a:ext cx="201168" cy="201168"/>
+          </a:xfrm>
+          <a:prstGeom prst="rect">
+            <a:avLst/>
+          </a:prstGeom>
+        </p:spPr>
+      </p:pic>
+      <p:sp>
+        <p:nvSpPr>
+          <p:cNvPr id="17" name="Text 14"/>
+          <p:cNvSpPr txBox="1"/>
+          <p:nvPr/>
+        </p:nvSpPr>
+        <p:spPr>
+          <a:xfrm>
+            <a:off x="8015173" y="91440"/>
+            <a:ext cx="3591306" cy="274320"/>
+          </a:xfrm>
+          <a:prstGeom prst="rect">
+            <a:avLst/>
+          </a:prstGeom>
+          <a:noFill/>
+          <a:ln/>
+        </p:spPr>
+        <p:txBody>
+          <a:bodyPr wrap="square" lIns="0" tIns="0" rIns="0" bIns="0" rtlCol="0" anchor="ctr"/>
+          <a:lstStyle/>
+          <a:p>
+            <a:pPr indent="0" marL="0">
+              <a:buNone/>
+            </a:pPr>
+            <a:r>
+              <a:rPr lang="en-US" sz="1100" b="1" dirty="0">
+                <a:solidFill>
+                  <a:srgbClr val="075985"/>
+                </a:solidFill>
+                <a:latin typeface="Calibri" pitchFamily="34" charset="0"/>
+                <a:ea typeface="Calibri" pitchFamily="34" charset="-122"/>
+                <a:cs typeface="Calibri" pitchFamily="34" charset="-120"/>
+              </a:rPr>
+              <a:t>UNDERSTAND NOW</a:t>
+            </a:r>
+            <a:pPr indent="0" marL="0">
+              <a:buNone/>
+            </a:pPr>
+            <a:r>
+              <a:rPr lang="en-US" sz="1100" dirty="0">
+                <a:solidFill>
+                  <a:srgbClr val="075985"/>
+                </a:solidFill>
+                <a:latin typeface="Calibri" pitchFamily="34" charset="0"/>
+                <a:ea typeface="Calibri" pitchFamily="34" charset="-122"/>
+                <a:cs typeface="Calibri" pitchFamily="34" charset="-120"/>
+              </a:rPr>
+              <a:t> · signed or unsigned instructions</a:t>
+            </a:r>
+            <a:endParaRPr lang="en-US" sz="1100" dirty="0"/>
           </a:p>
         </p:txBody>
       </p:sp>

--- a/en/slides/05-Computer_Architecture-Number_Representation_Integers-Code.pptx
+++ b/en/slides/05-Computer_Architecture-Number_Representation_Integers-Code.pptx
@@ -126,28 +126,28 @@
   <p:extLst>
     <p:ext uri="{521415D9-36F7-43E2-AB2F-B90AF26B5E84}">
       <p14:sectionLst xmlns:p14="http://schemas.microsoft.com/office/powerpoint/2010/main">
-        <p14:section name="Opening" id="{da70a767-e1b9-8e63-678b-5e791fce2f65}">
+        <p14:section name="Opening" id="{c76d5a7a-956a-306b-c55e-2275d7ed1a09}">
           <p14:sldIdLst>
             <p14:sldId id="256"/>
             <p14:sldId id="257"/>
           </p14:sldIdLst>
         </p14:section>
-        <p14:section name="Warm-up on the machine" id="{778d1fe2-22ef-97a1-7dcc-1985b720f5fe}">
+        <p14:section name="Warm-up on the machine" id="{5e6741bb-8968-f7de-dea8-d115bcc4f5a7}">
           <p14:sldIdLst>
             <p14:sldId id="258"/>
           </p14:sldIdLst>
         </p14:section>
-        <p14:section name="Natural numbers and overflow" id="{0d0b85bb-f2df-3ea5-3dd8-0d8a16d8eea6}">
+        <p14:section name="Natural numbers and overflow" id="{e6fafd12-30eb-09b2-267f-0eb07276e021}">
           <p14:sldIdLst>
             <p14:sldId id="259"/>
           </p14:sldIdLst>
         </p14:section>
-        <p14:section name="Signed integers" id="{cc4b13d5-788a-2aa0-eba9-4b9b013e6cfb}">
+        <p14:section name="Signed integers" id="{6cf32fa1-5a5b-3e03-9c17-3e49b1f63f37}">
           <p14:sldIdLst>
             <p14:sldId id="260"/>
           </p14:sldIdLst>
         </p14:section>
-        <p14:section name="Back to the machine" id="{30160bf0-0afb-f9b7-941f-52e4eed6dc89}">
+        <p14:section name="Back to the machine" id="{5c5616c2-78e4-e170-6509-1fa4aa58b5bc}">
           <p14:sldIdLst>
             <p14:sldId id="261"/>
             <p14:sldId id="262"/>
@@ -155,7 +155,7 @@
             <p14:sldId id="264"/>
           </p14:sldIdLst>
         </p14:section>
-        <p14:section name="The complete program" id="{5b9f1cac-27cb-8f49-65d7-f8c9e245c2bd}">
+        <p14:section name="The complete program" id="{709555a5-1d78-35e6-2068-f39b2b94205c}">
           <p14:sldIdLst>
             <p14:sldId id="265"/>
             <p14:sldId id="266"/>
@@ -164,7 +164,7 @@
             <p14:sldId id="269"/>
           </p14:sldIdLst>
         </p14:section>
-        <p14:section name="Run it and test it" id="{0831800d-6ada-8aac-e908-9a8785deec1f}">
+        <p14:section name="Run it and test it" id="{b0c03113-1d23-c119-85f9-6fcc157916d8}">
           <p14:sldIdLst>
             <p14:sldId id="270"/>
             <p14:sldId id="271"/>
@@ -173,7 +173,7 @@
             <p14:sldId id="274"/>
           </p14:sldIdLst>
         </p14:section>
-        <p14:section name="Exercises" id="{504a5dbe-6cfe-77a9-1df0-0986bb86a166}">
+        <p14:section name="Exercises" id="{7519c38a-bb60-a782-994a-2074b113bddb}">
           <p14:sldIdLst>
             <p14:sldId id="275"/>
           </p14:sldIdLst>
